--- a/Kubernetes/Trainer/K8s_TrackB_Trainer_Part2.pptx
+++ b/Kubernetes/Trainer/K8s_TrackB_Trainer_Part2.pptx
@@ -4,6 +4,9 @@
   <p:sldMasterIdLst>
     <p:sldMasterId id="2147483648" r:id="rId1"/>
   </p:sldMasterIdLst>
+  <p:notesMasterIdLst>
+    <p:notesMasterId r:id="rId12"/>
+  </p:notesMasterIdLst>
   <p:sldIdLst>
     <p:sldId id="256" r:id="rId2"/>
     <p:sldId id="257" r:id="rId3"/>
@@ -16,10 +19,7 @@
     <p:sldId id="264" r:id="rId10"/>
     <p:sldId id="265" r:id="rId11"/>
   </p:sldIdLst>
-  <p:notesMasterIdLst>
-    <p:notesMasterId r:id="rId12"/>
-  </p:notesMasterIdLst>
-  <p:sldSz cx="9144000" cy="5143500"/>
+  <p:sldSz cx="9144000" cy="5143500" type="screen16x9"/>
   <p:notesSz cx="5143500" cy="9144000"/>
   <p:defaultTextStyle>
     <a:lvl1pPr marL="0" algn="l" defTabSz="914400" rtl="0" eaLnBrk="1" latinLnBrk="0" hangingPunct="1">
@@ -113,7 +113,20 @@
       </a:defRPr>
     </a:lvl9pPr>
   </p:defaultTextStyle>
+  <p:extLst>
+    <p:ext uri="{EFAFB233-063F-42B5-8137-9DF3F51BA10A}">
+      <p15:sldGuideLst xmlns:p15="http://schemas.microsoft.com/office/powerpoint/2012/main"/>
+    </p:ext>
+  </p:extLst>
 </p:presentation>
+</file>
+
+<file path=ppt/revisionInfo.xml><?xml version="1.0" encoding="utf-8"?>
+<p1510:revInfo xmlns:a="http://schemas.openxmlformats.org/drawingml/2006/main" xmlns:r="http://schemas.openxmlformats.org/officeDocument/2006/relationships" xmlns:p1510="http://schemas.microsoft.com/office/powerpoint/2015/10/main">
+  <p1510:revLst>
+    <p1510:client id="{5D79251C-3B21-6317-725D-9605DE67E0F4}" v="1" dt="2026-07-14T17:51:36.749"/>
+  </p1510:revLst>
+</p1510:revInfo>
 </file>
 
 <file path=ppt/notesMasters/notesMaster1.xml><?xml version="1.0" encoding="utf-8"?>
@@ -151,7 +164,7 @@
         <p:spPr>
           <a:xfrm>
             <a:off x="0" y="0"/>
-            <a:ext cx="2971800" cy="458788"/>
+            <a:ext cx="2228850" cy="458788"/>
           </a:xfrm>
           <a:prstGeom prst="rect">
             <a:avLst/>
@@ -165,7 +178,7 @@
             </a:lvl1pPr>
           </a:lstStyle>
           <a:p>
-            <a:endParaRPr lang="en-US"/>
+            <a:endParaRPr lang="en-GB"/>
           </a:p>
         </p:txBody>
       </p:sp>
@@ -181,8 +194,8 @@
         </p:nvSpPr>
         <p:spPr>
           <a:xfrm>
-            <a:off x="3884613" y="0"/>
-            <a:ext cx="2971800" cy="458788"/>
+            <a:off x="2913063" y="0"/>
+            <a:ext cx="2228850" cy="458788"/>
           </a:xfrm>
           <a:prstGeom prst="rect">
             <a:avLst/>
@@ -196,11 +209,10 @@
             </a:lvl1pPr>
           </a:lstStyle>
           <a:p>
-            <a:fld id="{5282F153-3F37-0F45-9E97-73ACFA13230C}" type="datetimeFigureOut">
-              <a:rPr lang="en-US"/>
-              <a:t>7/23/19</a:t>
+            <a:fld id="{B572A0AA-BA04-42D8-BFD8-70ABF1897D66}" type="datetimeFigureOut">
+              <a:t>14/07/2026</a:t>
             </a:fld>
-            <a:endParaRPr lang="en-US"/>
+            <a:endParaRPr lang="en-GB"/>
           </a:p>
         </p:txBody>
       </p:sp>
@@ -216,7 +228,7 @@
         </p:nvSpPr>
         <p:spPr>
           <a:xfrm>
-            <a:off x="685800" y="1143000"/>
+            <a:off x="-171450" y="1143000"/>
             <a:ext cx="5486400" cy="3086100"/>
           </a:xfrm>
           <a:prstGeom prst="rect">
@@ -233,7 +245,7 @@
           <a:bodyPr vert="horz" lIns="91440" tIns="45720" rIns="91440" bIns="45720" rtlCol="0" anchor="ctr"/>
           <a:lstStyle/>
           <a:p>
-            <a:endParaRPr lang="en-US"/>
+            <a:endParaRPr lang="en-GB"/>
           </a:p>
         </p:txBody>
       </p:sp>
@@ -249,8 +261,8 @@
         </p:nvSpPr>
         <p:spPr>
           <a:xfrm>
-            <a:off x="685800" y="4400550"/>
-            <a:ext cx="5486400" cy="3600450"/>
+            <a:off x="514350" y="4400550"/>
+            <a:ext cx="4114800" cy="3600450"/>
           </a:xfrm>
           <a:prstGeom prst="rect">
             <a:avLst/>
@@ -262,35 +274,35 @@
           <a:p>
             <a:pPr lvl="0"/>
             <a:r>
-              <a:rPr lang="en-US"/>
+              <a:rPr lang="en-GB"/>
               <a:t>Click to edit Master text styles</a:t>
             </a:r>
           </a:p>
           <a:p>
             <a:pPr lvl="1"/>
             <a:r>
-              <a:rPr lang="en-US"/>
+              <a:rPr lang="en-GB"/>
               <a:t>Second level</a:t>
             </a:r>
           </a:p>
           <a:p>
             <a:pPr lvl="2"/>
             <a:r>
-              <a:rPr lang="en-US"/>
+              <a:rPr lang="en-GB"/>
               <a:t>Third level</a:t>
             </a:r>
           </a:p>
           <a:p>
             <a:pPr lvl="3"/>
             <a:r>
-              <a:rPr lang="en-US"/>
+              <a:rPr lang="en-GB"/>
               <a:t>Fourth level</a:t>
             </a:r>
           </a:p>
           <a:p>
             <a:pPr lvl="4"/>
             <a:r>
-              <a:rPr lang="en-US"/>
+              <a:rPr lang="en-GB"/>
               <a:t>Fifth level</a:t>
             </a:r>
           </a:p>
@@ -309,7 +321,7 @@
         <p:spPr>
           <a:xfrm>
             <a:off x="0" y="8685213"/>
-            <a:ext cx="2971800" cy="458787"/>
+            <a:ext cx="2228850" cy="458787"/>
           </a:xfrm>
           <a:prstGeom prst="rect">
             <a:avLst/>
@@ -323,7 +335,7 @@
             </a:lvl1pPr>
           </a:lstStyle>
           <a:p>
-            <a:endParaRPr lang="en-US"/>
+            <a:endParaRPr lang="en-GB"/>
           </a:p>
         </p:txBody>
       </p:sp>
@@ -339,8 +351,8 @@
         </p:nvSpPr>
         <p:spPr>
           <a:xfrm>
-            <a:off x="3884613" y="8685213"/>
-            <a:ext cx="2971800" cy="458787"/>
+            <a:off x="2913063" y="8685213"/>
+            <a:ext cx="2228850" cy="458787"/>
           </a:xfrm>
           <a:prstGeom prst="rect">
             <a:avLst/>
@@ -354,18 +366,17 @@
             </a:lvl1pPr>
           </a:lstStyle>
           <a:p>
-            <a:fld id="{CE5E9CC1-C706-0F49-92D6-E571CC5EEA8F}" type="slidenum">
-              <a:rPr lang="en-US"/>
+            <a:fld id="{099C2DCA-6378-494C-ABF8-012FE4AD0F66}" type="slidenum">
               <a:t>‹#›</a:t>
             </a:fld>
-            <a:endParaRPr lang="en-US"/>
+            <a:endParaRPr lang="en-GB"/>
           </a:p>
         </p:txBody>
       </p:sp>
     </p:spTree>
     <p:extLst>
       <p:ext uri="{BB962C8B-B14F-4D97-AF65-F5344CB8AC3E}">
-        <p14:creationId xmlns:p14="http://schemas.microsoft.com/office/powerpoint/2010/main" val="1024086991"/>
+        <p14:creationId xmlns:p14="http://schemas.microsoft.com/office/powerpoint/2010/main" val="3793207804"/>
       </p:ext>
     </p:extLst>
   </p:cSld>
@@ -514,7 +525,6 @@
               <a:t>TIMING: 11:15
 Say: 'In Track A you did rolling updates with a single command. Now we understand the mechanics — what controls how fast the update rolls out, how to pause and resume, and how to make Kubernetes scale automatically based on traffic.'</a:t>
             </a:r>
-            <a:endParaRPr lang="en-US" dirty="0"/>
           </a:p>
         </p:txBody>
       </p:sp>
@@ -607,7 +617,6 @@
   serviceAccountName: my-app-sa
 kubectl auth can-i list pods --as=system:serviceaccount:dev:my-app-sa   # check SA permissions</a:t>
             </a:r>
-            <a:endParaRPr lang="en-US" dirty="0"/>
           </a:p>
         </p:txBody>
       </p:sp>
@@ -704,7 +713,6 @@
 kubectl rollout undo deployment/webapp --to-revision=1   # go back to specific version
 When to use Recreate: stateful apps where two versions would conflict on a shared database schema. Rolling update would have v1 and v2 Pods running simultaneously reading/writing the same DB.</a:t>
             </a:r>
-            <a:endParaRPr lang="en-US" dirty="0"/>
           </a:p>
         </p:txBody>
       </p:sp>
@@ -800,7 +808,6 @@
 # Watch HPA scale up
 Common question: 'What if I also use kubectl scale manually?' Manual scaling overrides HPA temporarily — HPA will correct back to its target within 15 seconds.</a:t>
             </a:r>
-            <a:endParaRPr lang="en-US" dirty="0"/>
           </a:p>
         </p:txBody>
       </p:sp>
@@ -916,7 +923,6 @@
 2. ConfigMap not found — check name and namespace match exactly
 3. Quota blocks pod creation — describe quota to see current usage</a:t>
             </a:r>
-            <a:endParaRPr lang="en-US" dirty="0"/>
           </a:p>
         </p:txBody>
       </p:sp>
@@ -1004,7 +1010,6 @@
               <a:rPr lang="en-US" dirty="0"/>
               <a:t>During lab: walk the room and check everyone's namespace usage. The -n flag is the single biggest source of confusion on Day 1.</a:t>
             </a:r>
-            <a:endParaRPr lang="en-US" dirty="0"/>
           </a:p>
         </p:txBody>
       </p:sp>
@@ -1093,7 +1098,6 @@
               <a:t>TIMING: Day 2 — 09:10
 Say: 'Yesterday you stored config in ConfigMaps. ConfigMaps are fine for non-sensitive data. But passwords, API keys, tokens, certificates — these must NEVER go in a ConfigMap. Secrets are Kubernetes's answer. They are not perfectly secure on their own, but they are the right abstraction and integrate with external secret managers.'</a:t>
             </a:r>
-            <a:endParaRPr lang="en-US" dirty="0"/>
           </a:p>
         </p:txBody>
       </p:sp>
@@ -1192,7 +1196,6 @@
 echo 'bXlzZWNyZXQ=' | base64 -d   # decodes it
 kubectl exec -it &lt;pod&gt; -- env | grep DB_PASSWORD   # shows plaintext in pod</a:t>
             </a:r>
-            <a:endParaRPr lang="en-US" dirty="0"/>
           </a:p>
         </p:txBody>
       </p:sp>
@@ -1281,7 +1284,6 @@
               <a:t>TIMING: 09:28
 Say: 'Right now, if you give someone kubectl access to your cluster, they can do anything — delete pods, read secrets, deploy to production. RBAC lets you define exactly who can do what to which resources in which namespace. It is how you give a developer access to dev but not production.'</a:t>
             </a:r>
-            <a:endParaRPr lang="en-US" dirty="0"/>
           </a:p>
         </p:txBody>
       </p:sp>
@@ -1380,7 +1382,6 @@
 kubectl auth can-i get pods -n production --as=alice   # no
 This is the most powerful demo in Track B. Students see permission enforcement working live.</a:t>
             </a:r>
-            <a:endParaRPr lang="en-US" dirty="0"/>
           </a:p>
         </p:txBody>
       </p:sp>
@@ -1453,6 +1454,11 @@
 <file path=ppt/slideMasters/slideMaster1.xml><?xml version="1.0" encoding="utf-8"?>
 <p:sldMaster xmlns:a="http://schemas.openxmlformats.org/drawingml/2006/main" xmlns:r="http://schemas.openxmlformats.org/officeDocument/2006/relationships" xmlns:p="http://schemas.openxmlformats.org/presentationml/2006/main">
   <p:cSld>
+    <p:bg>
+      <p:bgRef idx="1001">
+        <a:schemeClr val="bg1"/>
+      </p:bgRef>
+    </p:bg>
     <p:spTree>
       <p:nvGrpSpPr>
         <p:cNvPr id="1" name=""/>
@@ -1735,6 +1741,7 @@
         <a:solidFill>
           <a:srgbClr val="0F172A"/>
         </a:solidFill>
+        <a:effectLst/>
       </p:bgPr>
     </p:bg>
     <p:spTree>
@@ -1778,35 +1785,6 @@
       </p:sp>
       <p:sp>
         <p:nvSpPr>
-          <p:cNvPr id="3" name="Shape 1"/>
-          <p:cNvSpPr/>
-          <p:nvPr/>
-        </p:nvSpPr>
-        <p:spPr>
-          <a:xfrm>
-            <a:off x="5943600" y="-914400"/>
-            <a:ext cx="4572000" cy="4572000"/>
-          </a:xfrm>
-          <a:prstGeom prst="ellipse">
-            <a:avLst/>
-          </a:prstGeom>
-          <a:solidFill>
-            <a:srgbClr val="326CE5">
-              <a:alpha val="10000"/>
-            </a:srgbClr>
-          </a:solidFill>
-          <a:ln w="12700">
-            <a:solidFill>
-              <a:srgbClr val="326CE5">
-                <a:alpha val="20000"/>
-              </a:srgbClr>
-            </a:solidFill>
-            <a:prstDash val="solid"/>
-          </a:ln>
-        </p:spPr>
-      </p:sp>
-      <p:sp>
-        <p:nvSpPr>
           <p:cNvPr id="4" name="Text 2"/>
           <p:cNvSpPr/>
           <p:nvPr/>
@@ -1826,11 +1804,11 @@
           <a:bodyPr wrap="square" lIns="0" tIns="0" rIns="0" bIns="0" rtlCol="0" anchor="ctr"/>
           <a:lstStyle/>
           <a:p>
-            <a:pPr indent="0" marL="0">
-              <a:buNone/>
-            </a:pPr>
-            <a:r>
-              <a:rPr lang="en-US" sz="1200" b="1" spc="400" kern="0" dirty="0">
+            <a:pPr marL="0" indent="0">
+              <a:buNone/>
+            </a:pPr>
+            <a:r>
+              <a:rPr lang="en-US" sz="1200" b="1" kern="0" spc="400" dirty="0">
                 <a:solidFill>
                   <a:srgbClr val="326CE5"/>
                 </a:solidFill>
@@ -1865,7 +1843,7 @@
           <a:bodyPr wrap="square" lIns="0" tIns="0" rIns="0" bIns="0" rtlCol="0" anchor="ctr"/>
           <a:lstStyle/>
           <a:p>
-            <a:pPr indent="0" marL="0">
+            <a:pPr marL="0" indent="0">
               <a:buNone/>
             </a:pPr>
             <a:r>
@@ -1904,7 +1882,7 @@
           <a:bodyPr wrap="square" lIns="0" tIns="0" rIns="0" bIns="0" rtlCol="0" anchor="ctr"/>
           <a:lstStyle/>
           <a:p>
-            <a:pPr indent="0" marL="0">
+            <a:pPr marL="0" indent="0">
               <a:buNone/>
             </a:pPr>
             <a:r>
@@ -1938,6 +1916,7 @@
         <a:solidFill>
           <a:srgbClr val="FFFFFF"/>
         </a:solidFill>
+        <a:effectLst/>
       </p:bgPr>
     </p:bg>
     <p:spTree>
@@ -2000,7 +1979,7 @@
           <a:bodyPr wrap="square" lIns="0" tIns="0" rIns="0" bIns="0" rtlCol="0" anchor="ctr"/>
           <a:lstStyle/>
           <a:p>
-            <a:pPr indent="0" marL="0">
+            <a:pPr marL="0" indent="0">
               <a:buNone/>
             </a:pPr>
             <a:r>
@@ -2066,7 +2045,7 @@
           <a:bodyPr wrap="square" lIns="0" tIns="0" rIns="0" bIns="0" rtlCol="0" anchor="ctr"/>
           <a:lstStyle/>
           <a:p>
-            <a:pPr algn="ctr" indent="0" marL="0">
+            <a:pPr marL="0" indent="0" algn="ctr">
               <a:buNone/>
             </a:pPr>
             <a:r>
@@ -2110,7 +2089,7 @@
             <a:prstDash val="solid"/>
           </a:ln>
           <a:effectLst>
-            <a:outerShdw sx="100000" sy="100000" kx="0" ky="0" algn="bl" rotWithShape="0" blurRad="76200" dist="38100" dir="2700000">
+            <a:outerShdw blurRad="76200" dist="38100" dir="2700000" algn="bl" rotWithShape="0">
               <a:srgbClr val="000000">
                 <a:alpha val="10000"/>
               </a:srgbClr>
@@ -2166,7 +2145,7 @@
           <a:bodyPr wrap="square" lIns="0" tIns="0" rIns="0" bIns="0" rtlCol="0" anchor="ctr"/>
           <a:lstStyle/>
           <a:p>
-            <a:pPr algn="ctr" indent="0" marL="0">
+            <a:pPr marL="0" indent="0" algn="ctr">
               <a:buNone/>
             </a:pPr>
             <a:r>
@@ -2205,7 +2184,7 @@
           <a:bodyPr wrap="square" lIns="0" tIns="0" rIns="0" bIns="0" rtlCol="0" anchor="ctr"/>
           <a:lstStyle/>
           <a:p>
-            <a:pPr indent="0" marL="0">
+            <a:pPr marL="0" indent="0">
               <a:buNone/>
             </a:pPr>
             <a:r>
@@ -2244,7 +2223,7 @@
           <a:bodyPr wrap="square" lIns="0" tIns="0" rIns="0" bIns="0" rtlCol="0" anchor="ctr"/>
           <a:lstStyle/>
           <a:p>
-            <a:pPr indent="0" marL="0">
+            <a:pPr marL="0" indent="0">
               <a:buNone/>
             </a:pPr>
             <a:r>
@@ -2288,7 +2267,7 @@
             <a:prstDash val="solid"/>
           </a:ln>
           <a:effectLst>
-            <a:outerShdw sx="100000" sy="100000" kx="0" ky="0" algn="bl" rotWithShape="0" blurRad="76200" dist="38100" dir="2700000">
+            <a:outerShdw blurRad="76200" dist="38100" dir="2700000" algn="bl" rotWithShape="0">
               <a:srgbClr val="000000">
                 <a:alpha val="10000"/>
               </a:srgbClr>
@@ -2344,7 +2323,7 @@
           <a:bodyPr wrap="square" lIns="0" tIns="0" rIns="0" bIns="0" rtlCol="0" anchor="ctr"/>
           <a:lstStyle/>
           <a:p>
-            <a:pPr algn="ctr" indent="0" marL="0">
+            <a:pPr marL="0" indent="0" algn="ctr">
               <a:buNone/>
             </a:pPr>
             <a:r>
@@ -2383,7 +2362,7 @@
           <a:bodyPr wrap="square" lIns="0" tIns="0" rIns="0" bIns="0" rtlCol="0" anchor="ctr"/>
           <a:lstStyle/>
           <a:p>
-            <a:pPr indent="0" marL="0">
+            <a:pPr marL="0" indent="0">
               <a:buNone/>
             </a:pPr>
             <a:r>
@@ -2422,7 +2401,7 @@
           <a:bodyPr wrap="square" lIns="0" tIns="0" rIns="0" bIns="0" rtlCol="0" anchor="ctr"/>
           <a:lstStyle/>
           <a:p>
-            <a:pPr indent="0" marL="0">
+            <a:pPr marL="0" indent="0">
               <a:buNone/>
             </a:pPr>
             <a:r>
@@ -2466,7 +2445,7 @@
             <a:prstDash val="solid"/>
           </a:ln>
           <a:effectLst>
-            <a:outerShdw sx="100000" sy="100000" kx="0" ky="0" algn="bl" rotWithShape="0" blurRad="76200" dist="38100" dir="2700000">
+            <a:outerShdw blurRad="76200" dist="38100" dir="2700000" algn="bl" rotWithShape="0">
               <a:srgbClr val="000000">
                 <a:alpha val="10000"/>
               </a:srgbClr>
@@ -2522,7 +2501,7 @@
           <a:bodyPr wrap="square" lIns="0" tIns="0" rIns="0" bIns="0" rtlCol="0" anchor="ctr"/>
           <a:lstStyle/>
           <a:p>
-            <a:pPr algn="ctr" indent="0" marL="0">
+            <a:pPr marL="0" indent="0" algn="ctr">
               <a:buNone/>
             </a:pPr>
             <a:r>
@@ -2561,7 +2540,7 @@
           <a:bodyPr wrap="square" lIns="0" tIns="0" rIns="0" bIns="0" rtlCol="0" anchor="ctr"/>
           <a:lstStyle/>
           <a:p>
-            <a:pPr indent="0" marL="0">
+            <a:pPr marL="0" indent="0">
               <a:buNone/>
             </a:pPr>
             <a:r>
@@ -2600,7 +2579,7 @@
           <a:bodyPr wrap="square" lIns="0" tIns="0" rIns="0" bIns="0" rtlCol="0" anchor="ctr"/>
           <a:lstStyle/>
           <a:p>
-            <a:pPr indent="0" marL="0">
+            <a:pPr marL="0" indent="0">
               <a:buNone/>
             </a:pPr>
             <a:r>
@@ -2664,7 +2643,7 @@
           <a:bodyPr wrap="square" lIns="0" tIns="0" rIns="0" bIns="0" rtlCol="0" anchor="ctr"/>
           <a:lstStyle/>
           <a:p>
-            <a:pPr algn="ctr" indent="0" marL="0">
+            <a:pPr marL="0" indent="0" algn="ctr">
               <a:buNone/>
             </a:pPr>
             <a:r>
@@ -2698,6 +2677,7 @@
         <a:solidFill>
           <a:srgbClr val="FFFFFF"/>
         </a:solidFill>
+        <a:effectLst/>
       </p:bgPr>
     </p:bg>
     <p:spTree>
@@ -2760,7 +2740,7 @@
           <a:bodyPr wrap="square" lIns="0" tIns="0" rIns="0" bIns="0" rtlCol="0" anchor="ctr"/>
           <a:lstStyle/>
           <a:p>
-            <a:pPr indent="0" marL="0">
+            <a:pPr marL="0" indent="0">
               <a:buNone/>
             </a:pPr>
             <a:r>
@@ -2826,7 +2806,7 @@
           <a:bodyPr wrap="square" lIns="0" tIns="0" rIns="0" bIns="0" rtlCol="0" anchor="ctr"/>
           <a:lstStyle/>
           <a:p>
-            <a:pPr algn="ctr" indent="0" marL="0">
+            <a:pPr marL="0" indent="0" algn="ctr">
               <a:buNone/>
             </a:pPr>
             <a:r>
@@ -2870,7 +2850,7 @@
             <a:prstDash val="solid"/>
           </a:ln>
           <a:effectLst>
-            <a:outerShdw sx="100000" sy="100000" kx="0" ky="0" algn="bl" rotWithShape="0" blurRad="76200" dist="38100" dir="2700000">
+            <a:outerShdw blurRad="76200" dist="38100" dir="2700000" algn="bl" rotWithShape="0">
               <a:srgbClr val="000000">
                 <a:alpha val="10000"/>
               </a:srgbClr>
@@ -2899,7 +2879,7 @@
           <a:bodyPr wrap="square" lIns="0" tIns="0" rIns="0" bIns="0" rtlCol="0" anchor="ctr"/>
           <a:lstStyle/>
           <a:p>
-            <a:pPr indent="0" marL="0">
+            <a:pPr marL="0" indent="0">
               <a:buNone/>
             </a:pPr>
             <a:r>
@@ -2943,7 +2923,7 @@
             <a:prstDash val="solid"/>
           </a:ln>
           <a:effectLst>
-            <a:outerShdw sx="100000" sy="100000" kx="0" ky="0" algn="bl" rotWithShape="0" blurRad="76200" dist="38100" dir="2700000">
+            <a:outerShdw blurRad="76200" dist="38100" dir="2700000" algn="bl" rotWithShape="0">
               <a:srgbClr val="000000">
                 <a:alpha val="10000"/>
               </a:srgbClr>
@@ -2972,7 +2952,7 @@
           <a:bodyPr wrap="square" lIns="0" tIns="0" rIns="0" bIns="0" rtlCol="0" anchor="ctr"/>
           <a:lstStyle/>
           <a:p>
-            <a:pPr indent="0" marL="0">
+            <a:pPr marL="0" indent="0">
               <a:buNone/>
             </a:pPr>
             <a:r>
@@ -3011,7 +2991,7 @@
           <a:bodyPr wrap="square" lIns="0" tIns="0" rIns="0" bIns="0" rtlCol="0" anchor="ctr"/>
           <a:lstStyle/>
           <a:p>
-            <a:pPr indent="0" marL="0">
+            <a:pPr marL="0" indent="0">
               <a:buNone/>
             </a:pPr>
             <a:r>
@@ -3050,7 +3030,7 @@
           <a:bodyPr wrap="square" lIns="0" tIns="0" rIns="0" bIns="0" rtlCol="0" anchor="ctr"/>
           <a:lstStyle/>
           <a:p>
-            <a:pPr indent="0" marL="0">
+            <a:pPr marL="0" indent="0">
               <a:buNone/>
             </a:pPr>
             <a:r>
@@ -3089,7 +3069,7 @@
           <a:bodyPr wrap="square" lIns="0" tIns="0" rIns="0" bIns="0" rtlCol="0" anchor="ctr"/>
           <a:lstStyle/>
           <a:p>
-            <a:pPr indent="0" marL="0">
+            <a:pPr marL="0" indent="0">
               <a:buNone/>
             </a:pPr>
             <a:r>
@@ -3128,7 +3108,7 @@
           <a:bodyPr wrap="square" lIns="0" tIns="0" rIns="0" bIns="0" rtlCol="0" anchor="ctr"/>
           <a:lstStyle/>
           <a:p>
-            <a:pPr indent="0" marL="0">
+            <a:pPr marL="0" indent="0">
               <a:buNone/>
             </a:pPr>
             <a:r>
@@ -3167,7 +3147,7 @@
           <a:bodyPr wrap="square" lIns="0" tIns="0" rIns="0" bIns="0" rtlCol="0" anchor="ctr"/>
           <a:lstStyle/>
           <a:p>
-            <a:pPr indent="0" marL="0">
+            <a:pPr marL="0" indent="0">
               <a:buNone/>
             </a:pPr>
             <a:r>
@@ -3206,7 +3186,7 @@
           <a:bodyPr wrap="square" lIns="0" tIns="0" rIns="0" bIns="0" rtlCol="0" anchor="ctr"/>
           <a:lstStyle/>
           <a:p>
-            <a:pPr indent="0" marL="0">
+            <a:pPr marL="0" indent="0">
               <a:buNone/>
             </a:pPr>
             <a:r>
@@ -3245,7 +3225,7 @@
           <a:bodyPr wrap="square" lIns="0" tIns="0" rIns="0" bIns="0" rtlCol="0" anchor="ctr"/>
           <a:lstStyle/>
           <a:p>
-            <a:pPr indent="0" marL="0">
+            <a:pPr marL="0" indent="0">
               <a:buNone/>
             </a:pPr>
             <a:r>
@@ -3284,7 +3264,7 @@
           <a:bodyPr wrap="square" lIns="0" tIns="0" rIns="0" bIns="0" rtlCol="0" anchor="ctr"/>
           <a:lstStyle/>
           <a:p>
-            <a:pPr indent="0" marL="0">
+            <a:pPr marL="0" indent="0">
               <a:buNone/>
             </a:pPr>
             <a:r>
@@ -3323,7 +3303,7 @@
           <a:bodyPr wrap="square" lIns="0" tIns="0" rIns="0" bIns="0" rtlCol="0" anchor="ctr"/>
           <a:lstStyle/>
           <a:p>
-            <a:pPr indent="0" marL="0">
+            <a:pPr marL="0" indent="0">
               <a:buNone/>
             </a:pPr>
             <a:r>
@@ -3362,7 +3342,7 @@
           <a:bodyPr wrap="square" lIns="0" tIns="0" rIns="0" bIns="0" rtlCol="0" anchor="ctr"/>
           <a:lstStyle/>
           <a:p>
-            <a:pPr indent="0" marL="0">
+            <a:pPr marL="0" indent="0">
               <a:buNone/>
             </a:pPr>
             <a:r>
@@ -3401,7 +3381,7 @@
           <a:bodyPr wrap="square" lIns="0" tIns="0" rIns="0" bIns="0" rtlCol="0" anchor="ctr"/>
           <a:lstStyle/>
           <a:p>
-            <a:pPr indent="0" marL="0">
+            <a:pPr marL="0" indent="0">
               <a:buNone/>
             </a:pPr>
             <a:r>
@@ -3440,7 +3420,7 @@
           <a:bodyPr wrap="square" lIns="0" tIns="0" rIns="0" bIns="0" rtlCol="0" anchor="ctr"/>
           <a:lstStyle/>
           <a:p>
-            <a:pPr indent="0" marL="0">
+            <a:pPr marL="0" indent="0">
               <a:buNone/>
             </a:pPr>
             <a:r>
@@ -3484,7 +3464,7 @@
             <a:prstDash val="solid"/>
           </a:ln>
           <a:effectLst>
-            <a:outerShdw sx="100000" sy="100000" kx="0" ky="0" algn="bl" rotWithShape="0" blurRad="76200" dist="38100" dir="2700000">
+            <a:outerShdw blurRad="76200" dist="38100" dir="2700000" algn="bl" rotWithShape="0">
               <a:srgbClr val="000000">
                 <a:alpha val="10000"/>
               </a:srgbClr>
@@ -3513,7 +3493,7 @@
           <a:bodyPr wrap="square" lIns="0" tIns="0" rIns="0" bIns="0" rtlCol="0" anchor="ctr"/>
           <a:lstStyle/>
           <a:p>
-            <a:pPr indent="0" marL="0">
+            <a:pPr marL="0" indent="0">
               <a:buNone/>
             </a:pPr>
             <a:r>
@@ -3552,7 +3532,7 @@
           <a:bodyPr wrap="square" lIns="0" tIns="0" rIns="0" bIns="0" rtlCol="0" anchor="ctr"/>
           <a:lstStyle/>
           <a:p>
-            <a:pPr indent="0" marL="0">
+            <a:pPr marL="0" indent="0">
               <a:buNone/>
             </a:pPr>
             <a:r>
@@ -3596,7 +3576,7 @@
             <a:prstDash val="solid"/>
           </a:ln>
           <a:effectLst>
-            <a:outerShdw sx="100000" sy="100000" kx="0" ky="0" algn="bl" rotWithShape="0" blurRad="76200" dist="38100" dir="2700000">
+            <a:outerShdw blurRad="76200" dist="38100" dir="2700000" algn="bl" rotWithShape="0">
               <a:srgbClr val="000000">
                 <a:alpha val="10000"/>
               </a:srgbClr>
@@ -3625,7 +3605,7 @@
           <a:bodyPr wrap="square" lIns="0" tIns="0" rIns="0" bIns="0" rtlCol="0" anchor="ctr"/>
           <a:lstStyle/>
           <a:p>
-            <a:pPr indent="0" marL="0">
+            <a:pPr marL="0" indent="0">
               <a:buNone/>
             </a:pPr>
             <a:r>
@@ -3664,7 +3644,7 @@
           <a:bodyPr wrap="square" lIns="0" tIns="0" rIns="0" bIns="0" rtlCol="0" anchor="ctr"/>
           <a:lstStyle/>
           <a:p>
-            <a:pPr indent="0" marL="0">
+            <a:pPr marL="0" indent="0">
               <a:buNone/>
             </a:pPr>
             <a:r>
@@ -3708,7 +3688,7 @@
             <a:prstDash val="solid"/>
           </a:ln>
           <a:effectLst>
-            <a:outerShdw sx="100000" sy="100000" kx="0" ky="0" algn="bl" rotWithShape="0" blurRad="76200" dist="38100" dir="2700000">
+            <a:outerShdw blurRad="76200" dist="38100" dir="2700000" algn="bl" rotWithShape="0">
               <a:srgbClr val="000000">
                 <a:alpha val="10000"/>
               </a:srgbClr>
@@ -3737,7 +3717,7 @@
           <a:bodyPr wrap="square" lIns="0" tIns="0" rIns="0" bIns="0" rtlCol="0" anchor="ctr"/>
           <a:lstStyle/>
           <a:p>
-            <a:pPr indent="0" marL="0">
+            <a:pPr marL="0" indent="0">
               <a:buNone/>
             </a:pPr>
             <a:r>
@@ -3776,7 +3756,7 @@
           <a:bodyPr wrap="square" lIns="0" tIns="0" rIns="0" bIns="0" rtlCol="0" anchor="ctr"/>
           <a:lstStyle/>
           <a:p>
-            <a:pPr indent="0" marL="0">
+            <a:pPr marL="0" indent="0">
               <a:buNone/>
             </a:pPr>
             <a:r>
@@ -3793,7 +3773,7 @@
             <a:endParaRPr lang="en-US" sz="950" dirty="0"/>
           </a:p>
           <a:p>
-            <a:pPr indent="0" marL="0">
+            <a:pPr marL="0" indent="0">
               <a:buNone/>
             </a:pPr>
             <a:r>
@@ -3810,7 +3790,7 @@
             <a:endParaRPr lang="en-US" sz="950" dirty="0"/>
           </a:p>
           <a:p>
-            <a:pPr indent="0" marL="0">
+            <a:pPr marL="0" indent="0">
               <a:buNone/>
             </a:pPr>
             <a:r>
@@ -3854,7 +3834,7 @@
             <a:prstDash val="solid"/>
           </a:ln>
           <a:effectLst>
-            <a:outerShdw sx="100000" sy="100000" kx="0" ky="0" algn="bl" rotWithShape="0" blurRad="76200" dist="38100" dir="2700000">
+            <a:outerShdw blurRad="76200" dist="38100" dir="2700000" algn="bl" rotWithShape="0">
               <a:srgbClr val="000000">
                 <a:alpha val="10000"/>
               </a:srgbClr>
@@ -3883,7 +3863,7 @@
           <a:bodyPr wrap="square" lIns="0" tIns="0" rIns="0" bIns="0" rtlCol="0" anchor="ctr"/>
           <a:lstStyle/>
           <a:p>
-            <a:pPr indent="0" marL="0">
+            <a:pPr marL="0" indent="0">
               <a:buNone/>
             </a:pPr>
             <a:r>
@@ -3922,7 +3902,7 @@
           <a:bodyPr wrap="square" lIns="0" tIns="0" rIns="0" bIns="0" rtlCol="0" anchor="ctr"/>
           <a:lstStyle/>
           <a:p>
-            <a:pPr indent="0" marL="0">
+            <a:pPr marL="0" indent="0">
               <a:buNone/>
             </a:pPr>
             <a:r>
@@ -3986,7 +3966,7 @@
           <a:bodyPr wrap="square" lIns="0" tIns="0" rIns="0" bIns="0" rtlCol="0" anchor="ctr"/>
           <a:lstStyle/>
           <a:p>
-            <a:pPr algn="ctr" indent="0" marL="0">
+            <a:pPr marL="0" indent="0" algn="ctr">
               <a:buNone/>
             </a:pPr>
             <a:r>
@@ -4020,6 +4000,7 @@
         <a:solidFill>
           <a:srgbClr val="FFFFFF"/>
         </a:solidFill>
+        <a:effectLst/>
       </p:bgPr>
     </p:bg>
     <p:spTree>
@@ -4082,7 +4063,7 @@
           <a:bodyPr wrap="square" lIns="0" tIns="0" rIns="0" bIns="0" rtlCol="0" anchor="ctr"/>
           <a:lstStyle/>
           <a:p>
-            <a:pPr indent="0" marL="0">
+            <a:pPr marL="0" indent="0">
               <a:buNone/>
             </a:pPr>
             <a:r>
@@ -4148,7 +4129,7 @@
           <a:bodyPr wrap="square" lIns="0" tIns="0" rIns="0" bIns="0" rtlCol="0" anchor="ctr"/>
           <a:lstStyle/>
           <a:p>
-            <a:pPr algn="ctr" indent="0" marL="0">
+            <a:pPr marL="0" indent="0" algn="ctr">
               <a:buNone/>
             </a:pPr>
             <a:r>
@@ -4192,7 +4173,7 @@
             <a:prstDash val="solid"/>
           </a:ln>
           <a:effectLst>
-            <a:outerShdw sx="100000" sy="100000" kx="0" ky="0" algn="bl" rotWithShape="0" blurRad="76200" dist="38100" dir="2700000">
+            <a:outerShdw blurRad="76200" dist="38100" dir="2700000" algn="bl" rotWithShape="0">
               <a:srgbClr val="000000">
                 <a:alpha val="10000"/>
               </a:srgbClr>
@@ -4221,7 +4202,7 @@
           <a:bodyPr wrap="square" lIns="0" tIns="0" rIns="0" bIns="0" rtlCol="0" anchor="ctr"/>
           <a:lstStyle/>
           <a:p>
-            <a:pPr indent="0" marL="0">
+            <a:pPr marL="0" indent="0">
               <a:buNone/>
             </a:pPr>
             <a:r>
@@ -4265,7 +4246,7 @@
             <a:prstDash val="solid"/>
           </a:ln>
           <a:effectLst>
-            <a:outerShdw sx="100000" sy="100000" kx="0" ky="0" algn="bl" rotWithShape="0" blurRad="76200" dist="38100" dir="2700000">
+            <a:outerShdw blurRad="76200" dist="38100" dir="2700000" algn="bl" rotWithShape="0">
               <a:srgbClr val="000000">
                 <a:alpha val="10000"/>
               </a:srgbClr>
@@ -4294,7 +4275,7 @@
           <a:bodyPr wrap="square" lIns="0" tIns="0" rIns="0" bIns="0" rtlCol="0" anchor="ctr"/>
           <a:lstStyle/>
           <a:p>
-            <a:pPr indent="0" marL="0">
+            <a:pPr marL="0" indent="0">
               <a:buNone/>
             </a:pPr>
             <a:r>
@@ -4333,7 +4314,7 @@
           <a:bodyPr wrap="square" lIns="0" tIns="0" rIns="0" bIns="0" rtlCol="0" anchor="ctr"/>
           <a:lstStyle/>
           <a:p>
-            <a:pPr indent="0" marL="0">
+            <a:pPr marL="0" indent="0">
               <a:buNone/>
             </a:pPr>
             <a:r>
@@ -4372,7 +4353,7 @@
           <a:bodyPr wrap="square" lIns="0" tIns="0" rIns="0" bIns="0" rtlCol="0" anchor="ctr"/>
           <a:lstStyle/>
           <a:p>
-            <a:pPr indent="0" marL="0">
+            <a:pPr marL="0" indent="0">
               <a:buNone/>
             </a:pPr>
             <a:r>
@@ -4411,7 +4392,7 @@
           <a:bodyPr wrap="square" lIns="0" tIns="0" rIns="0" bIns="0" rtlCol="0" anchor="ctr"/>
           <a:lstStyle/>
           <a:p>
-            <a:pPr indent="0" marL="0">
+            <a:pPr marL="0" indent="0">
               <a:buNone/>
             </a:pPr>
             <a:r>
@@ -4450,7 +4431,7 @@
           <a:bodyPr wrap="square" lIns="0" tIns="0" rIns="0" bIns="0" rtlCol="0" anchor="ctr"/>
           <a:lstStyle/>
           <a:p>
-            <a:pPr indent="0" marL="0">
+            <a:pPr marL="0" indent="0">
               <a:buNone/>
             </a:pPr>
             <a:r>
@@ -4489,7 +4470,7 @@
           <a:bodyPr wrap="square" lIns="0" tIns="0" rIns="0" bIns="0" rtlCol="0" anchor="ctr"/>
           <a:lstStyle/>
           <a:p>
-            <a:pPr indent="0" marL="0">
+            <a:pPr marL="0" indent="0">
               <a:buNone/>
             </a:pPr>
             <a:r>
@@ -4528,7 +4509,7 @@
           <a:bodyPr wrap="square" lIns="0" tIns="0" rIns="0" bIns="0" rtlCol="0" anchor="ctr"/>
           <a:lstStyle/>
           <a:p>
-            <a:pPr indent="0" marL="0">
+            <a:pPr marL="0" indent="0">
               <a:buNone/>
             </a:pPr>
             <a:r>
@@ -4567,7 +4548,7 @@
           <a:bodyPr wrap="square" lIns="0" tIns="0" rIns="0" bIns="0" rtlCol="0" anchor="ctr"/>
           <a:lstStyle/>
           <a:p>
-            <a:pPr indent="0" marL="0">
+            <a:pPr marL="0" indent="0">
               <a:buNone/>
             </a:pPr>
             <a:r>
@@ -4606,7 +4587,7 @@
           <a:bodyPr wrap="square" lIns="0" tIns="0" rIns="0" bIns="0" rtlCol="0" anchor="ctr"/>
           <a:lstStyle/>
           <a:p>
-            <a:pPr indent="0" marL="0">
+            <a:pPr marL="0" indent="0">
               <a:buNone/>
             </a:pPr>
             <a:r>
@@ -4645,7 +4626,7 @@
           <a:bodyPr wrap="square" lIns="0" tIns="0" rIns="0" bIns="0" rtlCol="0" anchor="ctr"/>
           <a:lstStyle/>
           <a:p>
-            <a:pPr indent="0" marL="0">
+            <a:pPr marL="0" indent="0">
               <a:buNone/>
             </a:pPr>
             <a:r>
@@ -4684,7 +4665,7 @@
           <a:bodyPr wrap="square" lIns="0" tIns="0" rIns="0" bIns="0" rtlCol="0" anchor="ctr"/>
           <a:lstStyle/>
           <a:p>
-            <a:pPr indent="0" marL="0">
+            <a:pPr marL="0" indent="0">
               <a:buNone/>
             </a:pPr>
             <a:r>
@@ -4723,7 +4704,7 @@
           <a:bodyPr wrap="square" lIns="0" tIns="0" rIns="0" bIns="0" rtlCol="0" anchor="ctr"/>
           <a:lstStyle/>
           <a:p>
-            <a:pPr indent="0" marL="0">
+            <a:pPr marL="0" indent="0">
               <a:buNone/>
             </a:pPr>
             <a:r>
@@ -4762,7 +4743,7 @@
           <a:bodyPr wrap="square" lIns="0" tIns="0" rIns="0" bIns="0" rtlCol="0" anchor="ctr"/>
           <a:lstStyle/>
           <a:p>
-            <a:pPr indent="0" marL="0">
+            <a:pPr marL="0" indent="0">
               <a:buNone/>
             </a:pPr>
             <a:r>
@@ -4806,7 +4787,7 @@
             <a:prstDash val="solid"/>
           </a:ln>
           <a:effectLst>
-            <a:outerShdw sx="100000" sy="100000" kx="0" ky="0" algn="bl" rotWithShape="0" blurRad="76200" dist="38100" dir="2700000">
+            <a:outerShdw blurRad="76200" dist="38100" dir="2700000" algn="bl" rotWithShape="0">
               <a:srgbClr val="000000">
                 <a:alpha val="10000"/>
               </a:srgbClr>
@@ -4835,7 +4816,7 @@
           <a:bodyPr wrap="square" lIns="0" tIns="0" rIns="0" bIns="0" rtlCol="0" anchor="ctr"/>
           <a:lstStyle/>
           <a:p>
-            <a:pPr indent="0" marL="0">
+            <a:pPr marL="0" indent="0">
               <a:buNone/>
             </a:pPr>
             <a:r>
@@ -4874,7 +4855,7 @@
           <a:bodyPr wrap="square" lIns="0" tIns="0" rIns="0" bIns="0" rtlCol="0" anchor="ctr"/>
           <a:lstStyle/>
           <a:p>
-            <a:pPr indent="0" marL="0">
+            <a:pPr marL="0" indent="0">
               <a:buNone/>
             </a:pPr>
             <a:r>
@@ -4918,7 +4899,7 @@
             <a:prstDash val="solid"/>
           </a:ln>
           <a:effectLst>
-            <a:outerShdw sx="100000" sy="100000" kx="0" ky="0" algn="bl" rotWithShape="0" blurRad="76200" dist="38100" dir="2700000">
+            <a:outerShdw blurRad="76200" dist="38100" dir="2700000" algn="bl" rotWithShape="0">
               <a:srgbClr val="000000">
                 <a:alpha val="10000"/>
               </a:srgbClr>
@@ -4947,7 +4928,7 @@
           <a:bodyPr wrap="square" lIns="0" tIns="0" rIns="0" bIns="0" rtlCol="0" anchor="ctr"/>
           <a:lstStyle/>
           <a:p>
-            <a:pPr indent="0" marL="0">
+            <a:pPr marL="0" indent="0">
               <a:buNone/>
             </a:pPr>
             <a:r>
@@ -4986,7 +4967,7 @@
           <a:bodyPr wrap="square" lIns="0" tIns="0" rIns="0" bIns="0" rtlCol="0" anchor="ctr"/>
           <a:lstStyle/>
           <a:p>
-            <a:pPr indent="0" marL="0">
+            <a:pPr marL="0" indent="0">
               <a:buNone/>
             </a:pPr>
             <a:r>
@@ -5030,7 +5011,7 @@
             <a:prstDash val="solid"/>
           </a:ln>
           <a:effectLst>
-            <a:outerShdw sx="100000" sy="100000" kx="0" ky="0" algn="bl" rotWithShape="0" blurRad="76200" dist="38100" dir="2700000">
+            <a:outerShdw blurRad="76200" dist="38100" dir="2700000" algn="bl" rotWithShape="0">
               <a:srgbClr val="000000">
                 <a:alpha val="10000"/>
               </a:srgbClr>
@@ -5059,7 +5040,7 @@
           <a:bodyPr wrap="square" lIns="0" tIns="0" rIns="0" bIns="0" rtlCol="0" anchor="ctr"/>
           <a:lstStyle/>
           <a:p>
-            <a:pPr indent="0" marL="0">
+            <a:pPr marL="0" indent="0">
               <a:buNone/>
             </a:pPr>
             <a:r>
@@ -5098,7 +5079,7 @@
           <a:bodyPr wrap="square" lIns="0" tIns="0" rIns="0" bIns="0" rtlCol="0" anchor="ctr"/>
           <a:lstStyle/>
           <a:p>
-            <a:pPr indent="0" marL="0">
+            <a:pPr marL="0" indent="0">
               <a:buNone/>
             </a:pPr>
             <a:r>
@@ -5142,7 +5123,7 @@
             <a:prstDash val="solid"/>
           </a:ln>
           <a:effectLst>
-            <a:outerShdw sx="100000" sy="100000" kx="0" ky="0" algn="bl" rotWithShape="0" blurRad="76200" dist="38100" dir="2700000">
+            <a:outerShdw blurRad="76200" dist="38100" dir="2700000" algn="bl" rotWithShape="0">
               <a:srgbClr val="000000">
                 <a:alpha val="10000"/>
               </a:srgbClr>
@@ -5171,7 +5152,7 @@
           <a:bodyPr wrap="square" lIns="0" tIns="0" rIns="0" bIns="0" rtlCol="0" anchor="ctr"/>
           <a:lstStyle/>
           <a:p>
-            <a:pPr indent="0" marL="0">
+            <a:pPr marL="0" indent="0">
               <a:buNone/>
             </a:pPr>
             <a:r>
@@ -5210,7 +5191,7 @@
           <a:bodyPr wrap="square" lIns="0" tIns="0" rIns="0" bIns="0" rtlCol="0" anchor="ctr"/>
           <a:lstStyle/>
           <a:p>
-            <a:pPr indent="0" marL="0">
+            <a:pPr marL="0" indent="0">
               <a:buNone/>
             </a:pPr>
             <a:r>
@@ -5227,7 +5208,7 @@
             <a:endParaRPr lang="en-US" sz="950" dirty="0"/>
           </a:p>
           <a:p>
-            <a:pPr indent="0" marL="0">
+            <a:pPr marL="0" indent="0">
               <a:buNone/>
             </a:pPr>
             <a:r>
@@ -5291,7 +5272,7 @@
           <a:bodyPr wrap="square" lIns="0" tIns="0" rIns="0" bIns="0" rtlCol="0" anchor="ctr"/>
           <a:lstStyle/>
           <a:p>
-            <a:pPr algn="ctr" indent="0" marL="0">
+            <a:pPr marL="0" indent="0" algn="ctr">
               <a:buNone/>
             </a:pPr>
             <a:r>
@@ -5325,6 +5306,7 @@
         <a:solidFill>
           <a:srgbClr val="0F172A"/>
         </a:solidFill>
+        <a:effectLst/>
       </p:bgPr>
     </p:bg>
     <p:spTree>
@@ -5416,11 +5398,11 @@
           <a:bodyPr wrap="square" lIns="0" tIns="0" rIns="0" bIns="0" rtlCol="0" anchor="ctr"/>
           <a:lstStyle/>
           <a:p>
-            <a:pPr indent="0" marL="0">
-              <a:buNone/>
-            </a:pPr>
-            <a:r>
-              <a:rPr lang="en-US" sz="1300" b="1" spc="200" kern="0" dirty="0">
+            <a:pPr marL="0" indent="0">
+              <a:buNone/>
+            </a:pPr>
+            <a:r>
+              <a:rPr lang="en-US" sz="1300" b="1" kern="0" spc="200" dirty="0">
                 <a:solidFill>
                   <a:srgbClr val="326CE5"/>
                 </a:solidFill>
@@ -5455,7 +5437,7 @@
           <a:bodyPr wrap="square" lIns="0" tIns="0" rIns="0" bIns="0" rtlCol="0" anchor="ctr"/>
           <a:lstStyle/>
           <a:p>
-            <a:pPr indent="0" marL="0">
+            <a:pPr marL="0" indent="0">
               <a:buNone/>
             </a:pPr>
             <a:r>
@@ -5544,7 +5526,7 @@
           <a:bodyPr wrap="square" lIns="0" tIns="0" rIns="0" bIns="0" rtlCol="0" anchor="ctr"/>
           <a:lstStyle/>
           <a:p>
-            <a:pPr algn="ctr" indent="0" marL="0">
+            <a:pPr marL="0" indent="0" algn="ctr">
               <a:buNone/>
             </a:pPr>
             <a:r>
@@ -5583,7 +5565,7 @@
           <a:bodyPr wrap="square" lIns="0" tIns="0" rIns="0" bIns="0" rtlCol="0" anchor="ctr"/>
           <a:lstStyle/>
           <a:p>
-            <a:pPr indent="0" marL="0">
+            <a:pPr marL="0" indent="0">
               <a:buNone/>
             </a:pPr>
             <a:r>
@@ -5647,7 +5629,7 @@
           <a:bodyPr wrap="square" lIns="0" tIns="0" rIns="0" bIns="0" rtlCol="0" anchor="ctr"/>
           <a:lstStyle/>
           <a:p>
-            <a:pPr algn="ctr" indent="0" marL="0">
+            <a:pPr marL="0" indent="0" algn="ctr">
               <a:buNone/>
             </a:pPr>
             <a:r>
@@ -5686,7 +5668,7 @@
           <a:bodyPr wrap="square" lIns="0" tIns="0" rIns="0" bIns="0" rtlCol="0" anchor="ctr"/>
           <a:lstStyle/>
           <a:p>
-            <a:pPr indent="0" marL="0">
+            <a:pPr marL="0" indent="0">
               <a:buNone/>
             </a:pPr>
             <a:r>
@@ -5750,7 +5732,7 @@
           <a:bodyPr wrap="square" lIns="0" tIns="0" rIns="0" bIns="0" rtlCol="0" anchor="ctr"/>
           <a:lstStyle/>
           <a:p>
-            <a:pPr algn="ctr" indent="0" marL="0">
+            <a:pPr marL="0" indent="0" algn="ctr">
               <a:buNone/>
             </a:pPr>
             <a:r>
@@ -5789,7 +5771,7 @@
           <a:bodyPr wrap="square" lIns="0" tIns="0" rIns="0" bIns="0" rtlCol="0" anchor="ctr"/>
           <a:lstStyle/>
           <a:p>
-            <a:pPr indent="0" marL="0">
+            <a:pPr marL="0" indent="0">
               <a:buNone/>
             </a:pPr>
             <a:r>
@@ -5853,7 +5835,7 @@
           <a:bodyPr wrap="square" lIns="0" tIns="0" rIns="0" bIns="0" rtlCol="0" anchor="ctr"/>
           <a:lstStyle/>
           <a:p>
-            <a:pPr algn="ctr" indent="0" marL="0">
+            <a:pPr marL="0" indent="0" algn="ctr">
               <a:buNone/>
             </a:pPr>
             <a:r>
@@ -5892,7 +5874,7 @@
           <a:bodyPr wrap="square" lIns="0" tIns="0" rIns="0" bIns="0" rtlCol="0" anchor="ctr"/>
           <a:lstStyle/>
           <a:p>
-            <a:pPr indent="0" marL="0">
+            <a:pPr marL="0" indent="0">
               <a:buNone/>
             </a:pPr>
             <a:r>
@@ -5956,7 +5938,7 @@
           <a:bodyPr wrap="square" lIns="0" tIns="0" rIns="0" bIns="0" rtlCol="0" anchor="ctr"/>
           <a:lstStyle/>
           <a:p>
-            <a:pPr algn="ctr" indent="0" marL="0">
+            <a:pPr marL="0" indent="0" algn="ctr">
               <a:buNone/>
             </a:pPr>
             <a:r>
@@ -5995,7 +5977,7 @@
           <a:bodyPr wrap="square" lIns="0" tIns="0" rIns="0" bIns="0" rtlCol="0" anchor="ctr"/>
           <a:lstStyle/>
           <a:p>
-            <a:pPr indent="0" marL="0">
+            <a:pPr marL="0" indent="0">
               <a:buNone/>
             </a:pPr>
             <a:r>
@@ -6059,7 +6041,7 @@
           <a:bodyPr wrap="square" lIns="0" tIns="0" rIns="0" bIns="0" rtlCol="0" anchor="ctr"/>
           <a:lstStyle/>
           <a:p>
-            <a:pPr algn="ctr" indent="0" marL="0">
+            <a:pPr marL="0" indent="0" algn="ctr">
               <a:buNone/>
             </a:pPr>
             <a:r>
@@ -6098,7 +6080,7 @@
           <a:bodyPr wrap="square" lIns="0" tIns="0" rIns="0" bIns="0" rtlCol="0" anchor="ctr"/>
           <a:lstStyle/>
           <a:p>
-            <a:pPr indent="0" marL="0">
+            <a:pPr marL="0" indent="0">
               <a:buNone/>
             </a:pPr>
             <a:r>
@@ -6168,7 +6150,7 @@
           <a:bodyPr wrap="square" lIns="0" tIns="0" rIns="0" bIns="0" rtlCol="0" anchor="ctr"/>
           <a:lstStyle/>
           <a:p>
-            <a:pPr algn="ctr" indent="0" marL="0">
+            <a:pPr marL="0" indent="0" algn="ctr">
               <a:buNone/>
             </a:pPr>
             <a:r>
@@ -6202,6 +6184,7 @@
         <a:solidFill>
           <a:srgbClr val="FFFFFF"/>
         </a:solidFill>
+        <a:effectLst/>
       </p:bgPr>
     </p:bg>
     <p:spTree>
@@ -6264,7 +6247,7 @@
           <a:bodyPr wrap="square" lIns="0" tIns="0" rIns="0" bIns="0" rtlCol="0" anchor="ctr"/>
           <a:lstStyle/>
           <a:p>
-            <a:pPr indent="0" marL="0">
+            <a:pPr marL="0" indent="0">
               <a:buNone/>
             </a:pPr>
             <a:r>
@@ -6330,7 +6313,7 @@
           <a:bodyPr wrap="square" lIns="0" tIns="0" rIns="0" bIns="0" rtlCol="0" anchor="ctr"/>
           <a:lstStyle/>
           <a:p>
-            <a:pPr algn="ctr" indent="0" marL="0">
+            <a:pPr marL="0" indent="0" algn="ctr">
               <a:buNone/>
             </a:pPr>
             <a:r>
@@ -6396,7 +6379,7 @@
           <a:bodyPr wrap="square" lIns="0" tIns="0" rIns="0" bIns="0" rtlCol="0" anchor="ctr"/>
           <a:lstStyle/>
           <a:p>
-            <a:pPr algn="ctr" indent="0" marL="0">
+            <a:pPr marL="0" indent="0" algn="ctr">
               <a:buNone/>
             </a:pPr>
             <a:r>
@@ -6440,7 +6423,7 @@
             <a:prstDash val="solid"/>
           </a:ln>
           <a:effectLst>
-            <a:outerShdw sx="100000" sy="100000" kx="0" ky="0" algn="bl" rotWithShape="0" blurRad="76200" dist="38100" dir="2700000">
+            <a:outerShdw blurRad="76200" dist="38100" dir="2700000" algn="bl" rotWithShape="0">
               <a:srgbClr val="000000">
                 <a:alpha val="10000"/>
               </a:srgbClr>
@@ -6469,7 +6452,7 @@
           <a:bodyPr wrap="square" lIns="0" tIns="0" rIns="0" bIns="0" rtlCol="0" anchor="ctr"/>
           <a:lstStyle/>
           <a:p>
-            <a:pPr indent="0" marL="0">
+            <a:pPr marL="0" indent="0">
               <a:buNone/>
             </a:pPr>
             <a:r>
@@ -6513,7 +6496,7 @@
             <a:prstDash val="solid"/>
           </a:ln>
           <a:effectLst>
-            <a:outerShdw sx="100000" sy="100000" kx="0" ky="0" algn="bl" rotWithShape="0" blurRad="76200" dist="38100" dir="2700000">
+            <a:outerShdw blurRad="76200" dist="38100" dir="2700000" algn="bl" rotWithShape="0">
               <a:srgbClr val="000000">
                 <a:alpha val="10000"/>
               </a:srgbClr>
@@ -6542,7 +6525,7 @@
           <a:bodyPr wrap="square" lIns="0" tIns="0" rIns="0" bIns="0" rtlCol="0" anchor="ctr"/>
           <a:lstStyle/>
           <a:p>
-            <a:pPr indent="0" marL="0">
+            <a:pPr marL="0" indent="0">
               <a:buNone/>
             </a:pPr>
             <a:r>
@@ -6581,7 +6564,7 @@
           <a:bodyPr wrap="square" lIns="0" tIns="0" rIns="0" bIns="0" rtlCol="0" anchor="ctr"/>
           <a:lstStyle/>
           <a:p>
-            <a:pPr indent="0" marL="0">
+            <a:pPr marL="0" indent="0">
               <a:buNone/>
             </a:pPr>
             <a:r>
@@ -6620,7 +6603,7 @@
           <a:bodyPr wrap="square" lIns="0" tIns="0" rIns="0" bIns="0" rtlCol="0" anchor="ctr"/>
           <a:lstStyle/>
           <a:p>
-            <a:pPr indent="0" marL="0">
+            <a:pPr marL="0" indent="0">
               <a:buNone/>
             </a:pPr>
             <a:r>
@@ -6659,7 +6642,7 @@
           <a:bodyPr wrap="square" lIns="0" tIns="0" rIns="0" bIns="0" rtlCol="0" anchor="ctr"/>
           <a:lstStyle/>
           <a:p>
-            <a:pPr indent="0" marL="0">
+            <a:pPr marL="0" indent="0">
               <a:buNone/>
             </a:pPr>
             <a:r>
@@ -6698,7 +6681,7 @@
           <a:bodyPr wrap="square" lIns="0" tIns="0" rIns="0" bIns="0" rtlCol="0" anchor="ctr"/>
           <a:lstStyle/>
           <a:p>
-            <a:pPr indent="0" marL="0">
+            <a:pPr marL="0" indent="0">
               <a:buNone/>
             </a:pPr>
             <a:r>
@@ -6737,7 +6720,7 @@
           <a:bodyPr wrap="square" lIns="0" tIns="0" rIns="0" bIns="0" rtlCol="0" anchor="ctr"/>
           <a:lstStyle/>
           <a:p>
-            <a:pPr indent="0" marL="0">
+            <a:pPr marL="0" indent="0">
               <a:buNone/>
             </a:pPr>
             <a:r>
@@ -6776,7 +6759,7 @@
           <a:bodyPr wrap="square" lIns="0" tIns="0" rIns="0" bIns="0" rtlCol="0" anchor="ctr"/>
           <a:lstStyle/>
           <a:p>
-            <a:pPr indent="0" marL="0">
+            <a:pPr marL="0" indent="0">
               <a:buNone/>
             </a:pPr>
             <a:r>
@@ -6815,7 +6798,7 @@
           <a:bodyPr wrap="square" lIns="0" tIns="0" rIns="0" bIns="0" rtlCol="0" anchor="ctr"/>
           <a:lstStyle/>
           <a:p>
-            <a:pPr indent="0" marL="0">
+            <a:pPr marL="0" indent="0">
               <a:buNone/>
             </a:pPr>
             <a:r>
@@ -6859,7 +6842,7 @@
             <a:prstDash val="solid"/>
           </a:ln>
           <a:effectLst>
-            <a:outerShdw sx="100000" sy="100000" kx="0" ky="0" algn="bl" rotWithShape="0" blurRad="76200" dist="38100" dir="2700000">
+            <a:outerShdw blurRad="76200" dist="38100" dir="2700000" algn="bl" rotWithShape="0">
               <a:srgbClr val="000000">
                 <a:alpha val="10000"/>
               </a:srgbClr>
@@ -6888,7 +6871,7 @@
           <a:bodyPr wrap="square" lIns="0" tIns="0" rIns="0" bIns="0" rtlCol="0" anchor="ctr"/>
           <a:lstStyle/>
           <a:p>
-            <a:pPr indent="0" marL="0">
+            <a:pPr marL="0" indent="0">
               <a:buNone/>
             </a:pPr>
             <a:r>
@@ -6927,7 +6910,7 @@
           <a:bodyPr wrap="square" lIns="0" tIns="0" rIns="0" bIns="0" rtlCol="0" anchor="ctr"/>
           <a:lstStyle/>
           <a:p>
-            <a:pPr indent="0" marL="0">
+            <a:pPr marL="0" indent="0">
               <a:buNone/>
             </a:pPr>
             <a:r>
@@ -6966,7 +6949,7 @@
           <a:bodyPr wrap="square" lIns="0" tIns="0" rIns="0" bIns="0" rtlCol="0" anchor="ctr"/>
           <a:lstStyle/>
           <a:p>
-            <a:pPr indent="0" marL="0">
+            <a:pPr marL="0" indent="0">
               <a:buNone/>
             </a:pPr>
             <a:r>
@@ -7005,7 +6988,7 @@
           <a:bodyPr wrap="square" lIns="0" tIns="0" rIns="0" bIns="0" rtlCol="0" anchor="ctr"/>
           <a:lstStyle/>
           <a:p>
-            <a:pPr indent="0" marL="0">
+            <a:pPr marL="0" indent="0">
               <a:buNone/>
             </a:pPr>
             <a:r>
@@ -7044,7 +7027,7 @@
           <a:bodyPr wrap="square" lIns="0" tIns="0" rIns="0" bIns="0" rtlCol="0" anchor="ctr"/>
           <a:lstStyle/>
           <a:p>
-            <a:pPr indent="0" marL="0">
+            <a:pPr marL="0" indent="0">
               <a:buNone/>
             </a:pPr>
             <a:r>
@@ -7083,7 +7066,7 @@
           <a:bodyPr wrap="square" lIns="0" tIns="0" rIns="0" bIns="0" rtlCol="0" anchor="ctr"/>
           <a:lstStyle/>
           <a:p>
-            <a:pPr indent="0" marL="0">
+            <a:pPr marL="0" indent="0">
               <a:buNone/>
             </a:pPr>
             <a:r>
@@ -7122,7 +7105,7 @@
           <a:bodyPr wrap="square" lIns="0" tIns="0" rIns="0" bIns="0" rtlCol="0" anchor="ctr"/>
           <a:lstStyle/>
           <a:p>
-            <a:pPr indent="0" marL="0">
+            <a:pPr marL="0" indent="0">
               <a:buNone/>
             </a:pPr>
             <a:r>
@@ -7161,7 +7144,7 @@
           <a:bodyPr wrap="square" lIns="0" tIns="0" rIns="0" bIns="0" rtlCol="0" anchor="ctr"/>
           <a:lstStyle/>
           <a:p>
-            <a:pPr indent="0" marL="0">
+            <a:pPr marL="0" indent="0">
               <a:buNone/>
             </a:pPr>
             <a:r>
@@ -7205,7 +7188,7 @@
             <a:prstDash val="solid"/>
           </a:ln>
           <a:effectLst>
-            <a:outerShdw sx="100000" sy="100000" kx="0" ky="0" algn="bl" rotWithShape="0" blurRad="76200" dist="38100" dir="2700000">
+            <a:outerShdw blurRad="76200" dist="38100" dir="2700000" algn="bl" rotWithShape="0">
               <a:srgbClr val="000000">
                 <a:alpha val="10000"/>
               </a:srgbClr>
@@ -7234,7 +7217,7 @@
           <a:bodyPr wrap="square" lIns="0" tIns="0" rIns="0" bIns="0" rtlCol="0" anchor="ctr"/>
           <a:lstStyle/>
           <a:p>
-            <a:pPr indent="0" marL="0">
+            <a:pPr marL="0" indent="0">
               <a:buNone/>
             </a:pPr>
             <a:r>
@@ -7273,7 +7256,7 @@
           <a:bodyPr wrap="square" lIns="0" tIns="0" rIns="0" bIns="0" rtlCol="0" anchor="ctr"/>
           <a:lstStyle/>
           <a:p>
-            <a:pPr indent="0" marL="0">
+            <a:pPr marL="0" indent="0">
               <a:buNone/>
             </a:pPr>
             <a:r>
@@ -7312,7 +7295,7 @@
           <a:bodyPr wrap="square" lIns="0" tIns="0" rIns="0" bIns="0" rtlCol="0" anchor="ctr"/>
           <a:lstStyle/>
           <a:p>
-            <a:pPr indent="0" marL="0">
+            <a:pPr marL="0" indent="0">
               <a:buNone/>
             </a:pPr>
             <a:r>
@@ -7351,7 +7334,7 @@
           <a:bodyPr wrap="square" lIns="0" tIns="0" rIns="0" bIns="0" rtlCol="0" anchor="ctr"/>
           <a:lstStyle/>
           <a:p>
-            <a:pPr indent="0" marL="0">
+            <a:pPr marL="0" indent="0">
               <a:buNone/>
             </a:pPr>
             <a:r>
@@ -7390,7 +7373,7 @@
           <a:bodyPr wrap="square" lIns="0" tIns="0" rIns="0" bIns="0" rtlCol="0" anchor="ctr"/>
           <a:lstStyle/>
           <a:p>
-            <a:pPr indent="0" marL="0">
+            <a:pPr marL="0" indent="0">
               <a:buNone/>
             </a:pPr>
             <a:r>
@@ -7429,7 +7412,7 @@
           <a:bodyPr wrap="square" lIns="0" tIns="0" rIns="0" bIns="0" rtlCol="0" anchor="ctr"/>
           <a:lstStyle/>
           <a:p>
-            <a:pPr indent="0" marL="0">
+            <a:pPr marL="0" indent="0">
               <a:buNone/>
             </a:pPr>
             <a:r>
@@ -7468,7 +7451,7 @@
           <a:bodyPr wrap="square" lIns="0" tIns="0" rIns="0" bIns="0" rtlCol="0" anchor="ctr"/>
           <a:lstStyle/>
           <a:p>
-            <a:pPr indent="0" marL="0">
+            <a:pPr marL="0" indent="0">
               <a:buNone/>
             </a:pPr>
             <a:r>
@@ -7512,7 +7495,7 @@
             <a:prstDash val="solid"/>
           </a:ln>
           <a:effectLst>
-            <a:outerShdw sx="100000" sy="100000" kx="0" ky="0" algn="bl" rotWithShape="0" blurRad="76200" dist="38100" dir="2700000">
+            <a:outerShdw blurRad="76200" dist="38100" dir="2700000" algn="bl" rotWithShape="0">
               <a:srgbClr val="000000">
                 <a:alpha val="10000"/>
               </a:srgbClr>
@@ -7541,7 +7524,7 @@
           <a:bodyPr wrap="square" lIns="0" tIns="0" rIns="0" bIns="0" rtlCol="0" anchor="ctr"/>
           <a:lstStyle/>
           <a:p>
-            <a:pPr indent="0" marL="0">
+            <a:pPr marL="0" indent="0">
               <a:buNone/>
             </a:pPr>
             <a:r>
@@ -7580,7 +7563,7 @@
           <a:bodyPr wrap="square" lIns="0" tIns="0" rIns="0" bIns="0" rtlCol="0" anchor="ctr"/>
           <a:lstStyle/>
           <a:p>
-            <a:pPr indent="0" marL="0">
+            <a:pPr marL="0" indent="0">
               <a:buNone/>
             </a:pPr>
             <a:r>
@@ -7644,7 +7627,7 @@
           <a:bodyPr wrap="square" lIns="0" tIns="0" rIns="0" bIns="0" rtlCol="0" anchor="ctr"/>
           <a:lstStyle/>
           <a:p>
-            <a:pPr algn="ctr" indent="0" marL="0">
+            <a:pPr marL="0" indent="0" algn="ctr">
               <a:buNone/>
             </a:pPr>
             <a:r>
@@ -7678,6 +7661,7 @@
         <a:solidFill>
           <a:srgbClr val="0F172A"/>
         </a:solidFill>
+        <a:effectLst/>
       </p:bgPr>
     </p:bg>
     <p:spTree>
@@ -7769,11 +7753,11 @@
           <a:bodyPr wrap="square" lIns="0" tIns="0" rIns="0" bIns="0" rtlCol="0" anchor="ctr"/>
           <a:lstStyle/>
           <a:p>
-            <a:pPr indent="0" marL="0">
-              <a:buNone/>
-            </a:pPr>
-            <a:r>
-              <a:rPr lang="en-US" sz="1200" b="1" spc="400" kern="0" dirty="0">
+            <a:pPr marL="0" indent="0">
+              <a:buNone/>
+            </a:pPr>
+            <a:r>
+              <a:rPr lang="en-US" sz="1200" b="1" kern="0" spc="400" dirty="0">
                 <a:solidFill>
                   <a:srgbClr val="326CE5"/>
                 </a:solidFill>
@@ -7808,7 +7792,7 @@
           <a:bodyPr wrap="square" lIns="0" tIns="0" rIns="0" bIns="0" rtlCol="0" anchor="ctr"/>
           <a:lstStyle/>
           <a:p>
-            <a:pPr indent="0" marL="0">
+            <a:pPr marL="0" indent="0">
               <a:buNone/>
             </a:pPr>
             <a:r>
@@ -7847,7 +7831,7 @@
           <a:bodyPr wrap="square" lIns="0" tIns="0" rIns="0" bIns="0" rtlCol="0" anchor="ctr"/>
           <a:lstStyle/>
           <a:p>
-            <a:pPr indent="0" marL="0">
+            <a:pPr marL="0" indent="0">
               <a:buNone/>
             </a:pPr>
             <a:r>
@@ -7881,6 +7865,7 @@
         <a:solidFill>
           <a:srgbClr val="FFFFFF"/>
         </a:solidFill>
+        <a:effectLst/>
       </p:bgPr>
     </p:bg>
     <p:spTree>
@@ -7943,7 +7928,7 @@
           <a:bodyPr wrap="square" lIns="0" tIns="0" rIns="0" bIns="0" rtlCol="0" anchor="ctr"/>
           <a:lstStyle/>
           <a:p>
-            <a:pPr indent="0" marL="0">
+            <a:pPr marL="0" indent="0">
               <a:buNone/>
             </a:pPr>
             <a:r>
@@ -8009,7 +7994,7 @@
           <a:bodyPr wrap="square" lIns="0" tIns="0" rIns="0" bIns="0" rtlCol="0" anchor="ctr"/>
           <a:lstStyle/>
           <a:p>
-            <a:pPr algn="ctr" indent="0" marL="0">
+            <a:pPr marL="0" indent="0" algn="ctr">
               <a:buNone/>
             </a:pPr>
             <a:r>
@@ -8053,7 +8038,7 @@
             <a:prstDash val="solid"/>
           </a:ln>
           <a:effectLst>
-            <a:outerShdw sx="100000" sy="100000" kx="0" ky="0" algn="bl" rotWithShape="0" blurRad="76200" dist="38100" dir="2700000">
+            <a:outerShdw blurRad="76200" dist="38100" dir="2700000" algn="bl" rotWithShape="0">
               <a:srgbClr val="000000">
                 <a:alpha val="10000"/>
               </a:srgbClr>
@@ -8082,7 +8067,7 @@
           <a:bodyPr wrap="square" lIns="0" tIns="0" rIns="0" bIns="0" rtlCol="0" anchor="ctr"/>
           <a:lstStyle/>
           <a:p>
-            <a:pPr indent="0" marL="0">
+            <a:pPr marL="0" indent="0">
               <a:buNone/>
             </a:pPr>
             <a:r>
@@ -8126,7 +8111,7 @@
             <a:prstDash val="solid"/>
           </a:ln>
           <a:effectLst>
-            <a:outerShdw sx="100000" sy="100000" kx="0" ky="0" algn="bl" rotWithShape="0" blurRad="76200" dist="38100" dir="2700000">
+            <a:outerShdw blurRad="76200" dist="38100" dir="2700000" algn="bl" rotWithShape="0">
               <a:srgbClr val="000000">
                 <a:alpha val="10000"/>
               </a:srgbClr>
@@ -8155,7 +8140,7 @@
           <a:bodyPr wrap="square" lIns="0" tIns="0" rIns="0" bIns="0" rtlCol="0" anchor="ctr"/>
           <a:lstStyle/>
           <a:p>
-            <a:pPr indent="0" marL="0">
+            <a:pPr marL="0" indent="0">
               <a:buNone/>
             </a:pPr>
             <a:r>
@@ -8194,7 +8179,7 @@
           <a:bodyPr wrap="square" lIns="0" tIns="0" rIns="0" bIns="0" rtlCol="0" anchor="ctr"/>
           <a:lstStyle/>
           <a:p>
-            <a:pPr indent="0" marL="0">
+            <a:pPr marL="0" indent="0">
               <a:buNone/>
             </a:pPr>
             <a:r>
@@ -8233,7 +8218,7 @@
           <a:bodyPr wrap="square" lIns="0" tIns="0" rIns="0" bIns="0" rtlCol="0" anchor="ctr"/>
           <a:lstStyle/>
           <a:p>
-            <a:pPr indent="0" marL="0">
+            <a:pPr marL="0" indent="0">
               <a:buNone/>
             </a:pPr>
             <a:r>
@@ -8272,7 +8257,7 @@
           <a:bodyPr wrap="square" lIns="0" tIns="0" rIns="0" bIns="0" rtlCol="0" anchor="ctr"/>
           <a:lstStyle/>
           <a:p>
-            <a:pPr indent="0" marL="0">
+            <a:pPr marL="0" indent="0">
               <a:buNone/>
             </a:pPr>
             <a:r>
@@ -8311,7 +8296,7 @@
           <a:bodyPr wrap="square" lIns="0" tIns="0" rIns="0" bIns="0" rtlCol="0" anchor="ctr"/>
           <a:lstStyle/>
           <a:p>
-            <a:pPr indent="0" marL="0">
+            <a:pPr marL="0" indent="0">
               <a:buNone/>
             </a:pPr>
             <a:r>
@@ -8350,7 +8335,7 @@
           <a:bodyPr wrap="square" lIns="0" tIns="0" rIns="0" bIns="0" rtlCol="0" anchor="ctr"/>
           <a:lstStyle/>
           <a:p>
-            <a:pPr indent="0" marL="0">
+            <a:pPr marL="0" indent="0">
               <a:buNone/>
             </a:pPr>
             <a:r>
@@ -8389,7 +8374,7 @@
           <a:bodyPr wrap="square" lIns="0" tIns="0" rIns="0" bIns="0" rtlCol="0" anchor="ctr"/>
           <a:lstStyle/>
           <a:p>
-            <a:pPr indent="0" marL="0">
+            <a:pPr marL="0" indent="0">
               <a:buNone/>
             </a:pPr>
             <a:r>
@@ -8428,7 +8413,7 @@
           <a:bodyPr wrap="square" lIns="0" tIns="0" rIns="0" bIns="0" rtlCol="0" anchor="ctr"/>
           <a:lstStyle/>
           <a:p>
-            <a:pPr indent="0" marL="0">
+            <a:pPr marL="0" indent="0">
               <a:buNone/>
             </a:pPr>
             <a:r>
@@ -8467,7 +8452,7 @@
           <a:bodyPr wrap="square" lIns="0" tIns="0" rIns="0" bIns="0" rtlCol="0" anchor="ctr"/>
           <a:lstStyle/>
           <a:p>
-            <a:pPr indent="0" marL="0">
+            <a:pPr marL="0" indent="0">
               <a:buNone/>
             </a:pPr>
             <a:r>
@@ -8506,7 +8491,7 @@
           <a:bodyPr wrap="square" lIns="0" tIns="0" rIns="0" bIns="0" rtlCol="0" anchor="ctr"/>
           <a:lstStyle/>
           <a:p>
-            <a:pPr indent="0" marL="0">
+            <a:pPr marL="0" indent="0">
               <a:buNone/>
             </a:pPr>
             <a:r>
@@ -8545,7 +8530,7 @@
           <a:bodyPr wrap="square" lIns="0" tIns="0" rIns="0" bIns="0" rtlCol="0" anchor="ctr"/>
           <a:lstStyle/>
           <a:p>
-            <a:pPr indent="0" marL="0">
+            <a:pPr marL="0" indent="0">
               <a:buNone/>
             </a:pPr>
             <a:r>
@@ -8589,7 +8574,7 @@
             <a:prstDash val="solid"/>
           </a:ln>
           <a:effectLst>
-            <a:outerShdw sx="100000" sy="100000" kx="0" ky="0" algn="bl" rotWithShape="0" blurRad="76200" dist="38100" dir="2700000">
+            <a:outerShdw blurRad="76200" dist="38100" dir="2700000" algn="bl" rotWithShape="0">
               <a:srgbClr val="000000">
                 <a:alpha val="10000"/>
               </a:srgbClr>
@@ -8645,7 +8630,7 @@
           <a:bodyPr wrap="square" lIns="0" tIns="0" rIns="0" bIns="0" rtlCol="0" anchor="ctr"/>
           <a:lstStyle/>
           <a:p>
-            <a:pPr algn="ctr" indent="0" marL="0">
+            <a:pPr marL="0" indent="0" algn="ctr">
               <a:buNone/>
             </a:pPr>
             <a:r>
@@ -8689,7 +8674,7 @@
             <a:prstDash val="solid"/>
           </a:ln>
           <a:effectLst>
-            <a:outerShdw sx="100000" sy="100000" kx="0" ky="0" algn="bl" rotWithShape="0" blurRad="76200" dist="38100" dir="2700000">
+            <a:outerShdw blurRad="76200" dist="38100" dir="2700000" algn="bl" rotWithShape="0">
               <a:srgbClr val="000000">
                 <a:alpha val="10000"/>
               </a:srgbClr>
@@ -8718,7 +8703,7 @@
           <a:bodyPr wrap="square" lIns="0" tIns="0" rIns="0" bIns="0" rtlCol="0" anchor="ctr"/>
           <a:lstStyle/>
           <a:p>
-            <a:pPr indent="0" marL="0">
+            <a:pPr marL="0" indent="0">
               <a:buNone/>
             </a:pPr>
             <a:r>
@@ -8757,7 +8742,7 @@
           <a:bodyPr wrap="square" lIns="0" tIns="0" rIns="0" bIns="0" rtlCol="0" anchor="ctr"/>
           <a:lstStyle/>
           <a:p>
-            <a:pPr indent="0" marL="0">
+            <a:pPr marL="0" indent="0">
               <a:buNone/>
             </a:pPr>
             <a:r>
@@ -8796,7 +8781,7 @@
           <a:bodyPr wrap="square" lIns="0" tIns="0" rIns="0" bIns="0" rtlCol="0" anchor="ctr"/>
           <a:lstStyle/>
           <a:p>
-            <a:pPr indent="0" marL="0">
+            <a:pPr marL="0" indent="0">
               <a:buNone/>
             </a:pPr>
             <a:r>
@@ -8835,7 +8820,7 @@
           <a:bodyPr wrap="square" lIns="0" tIns="0" rIns="0" bIns="0" rtlCol="0" anchor="ctr"/>
           <a:lstStyle/>
           <a:p>
-            <a:pPr indent="0" marL="0">
+            <a:pPr marL="0" indent="0">
               <a:buNone/>
             </a:pPr>
             <a:r>
@@ -8874,7 +8859,7 @@
           <a:bodyPr wrap="square" lIns="0" tIns="0" rIns="0" bIns="0" rtlCol="0" anchor="ctr"/>
           <a:lstStyle/>
           <a:p>
-            <a:pPr indent="0" marL="0">
+            <a:pPr marL="0" indent="0">
               <a:buNone/>
             </a:pPr>
             <a:r>
@@ -8913,7 +8898,7 @@
           <a:bodyPr wrap="square" lIns="0" tIns="0" rIns="0" bIns="0" rtlCol="0" anchor="ctr"/>
           <a:lstStyle/>
           <a:p>
-            <a:pPr indent="0" marL="0">
+            <a:pPr marL="0" indent="0">
               <a:buNone/>
             </a:pPr>
             <a:r>
@@ -8957,7 +8942,7 @@
             <a:prstDash val="solid"/>
           </a:ln>
           <a:effectLst>
-            <a:outerShdw sx="100000" sy="100000" kx="0" ky="0" algn="bl" rotWithShape="0" blurRad="76200" dist="38100" dir="2700000">
+            <a:outerShdw blurRad="76200" dist="38100" dir="2700000" algn="bl" rotWithShape="0">
               <a:srgbClr val="000000">
                 <a:alpha val="10000"/>
               </a:srgbClr>
@@ -9013,7 +8998,7 @@
           <a:bodyPr wrap="square" lIns="0" tIns="0" rIns="0" bIns="0" rtlCol="0" anchor="ctr"/>
           <a:lstStyle/>
           <a:p>
-            <a:pPr algn="ctr" indent="0" marL="0">
+            <a:pPr marL="0" indent="0" algn="ctr">
               <a:buNone/>
             </a:pPr>
             <a:r>
@@ -9057,7 +9042,7 @@
             <a:prstDash val="solid"/>
           </a:ln>
           <a:effectLst>
-            <a:outerShdw sx="100000" sy="100000" kx="0" ky="0" algn="bl" rotWithShape="0" blurRad="76200" dist="38100" dir="2700000">
+            <a:outerShdw blurRad="76200" dist="38100" dir="2700000" algn="bl" rotWithShape="0">
               <a:srgbClr val="000000">
                 <a:alpha val="10000"/>
               </a:srgbClr>
@@ -9086,7 +9071,7 @@
           <a:bodyPr wrap="square" lIns="0" tIns="0" rIns="0" bIns="0" rtlCol="0" anchor="ctr"/>
           <a:lstStyle/>
           <a:p>
-            <a:pPr indent="0" marL="0">
+            <a:pPr marL="0" indent="0">
               <a:buNone/>
             </a:pPr>
             <a:r>
@@ -9125,7 +9110,7 @@
           <a:bodyPr wrap="square" lIns="0" tIns="0" rIns="0" bIns="0" rtlCol="0" anchor="ctr"/>
           <a:lstStyle/>
           <a:p>
-            <a:pPr indent="0" marL="0">
+            <a:pPr marL="0" indent="0">
               <a:buNone/>
             </a:pPr>
             <a:r>
@@ -9164,7 +9149,7 @@
           <a:bodyPr wrap="square" lIns="0" tIns="0" rIns="0" bIns="0" rtlCol="0" anchor="ctr"/>
           <a:lstStyle/>
           <a:p>
-            <a:pPr indent="0" marL="0">
+            <a:pPr marL="0" indent="0">
               <a:buNone/>
             </a:pPr>
             <a:r>
@@ -9203,7 +9188,7 @@
           <a:bodyPr wrap="square" lIns="0" tIns="0" rIns="0" bIns="0" rtlCol="0" anchor="ctr"/>
           <a:lstStyle/>
           <a:p>
-            <a:pPr indent="0" marL="0">
+            <a:pPr marL="0" indent="0">
               <a:buNone/>
             </a:pPr>
             <a:r>
@@ -9242,7 +9227,7 @@
           <a:bodyPr wrap="square" lIns="0" tIns="0" rIns="0" bIns="0" rtlCol="0" anchor="ctr"/>
           <a:lstStyle/>
           <a:p>
-            <a:pPr indent="0" marL="0">
+            <a:pPr marL="0" indent="0">
               <a:buNone/>
             </a:pPr>
             <a:r>
@@ -9281,7 +9266,7 @@
           <a:bodyPr wrap="square" lIns="0" tIns="0" rIns="0" bIns="0" rtlCol="0" anchor="ctr"/>
           <a:lstStyle/>
           <a:p>
-            <a:pPr indent="0" marL="0">
+            <a:pPr marL="0" indent="0">
               <a:buNone/>
             </a:pPr>
             <a:r>
@@ -9320,7 +9305,7 @@
           <a:bodyPr wrap="square" lIns="0" tIns="0" rIns="0" bIns="0" rtlCol="0" anchor="ctr"/>
           <a:lstStyle/>
           <a:p>
-            <a:pPr indent="0" marL="0">
+            <a:pPr marL="0" indent="0">
               <a:buNone/>
             </a:pPr>
             <a:r>
@@ -9364,7 +9349,7 @@
             <a:prstDash val="solid"/>
           </a:ln>
           <a:effectLst>
-            <a:outerShdw sx="100000" sy="100000" kx="0" ky="0" algn="bl" rotWithShape="0" blurRad="76200" dist="38100" dir="2700000">
+            <a:outerShdw blurRad="76200" dist="38100" dir="2700000" algn="bl" rotWithShape="0">
               <a:srgbClr val="000000">
                 <a:alpha val="10000"/>
               </a:srgbClr>
@@ -9393,7 +9378,7 @@
           <a:bodyPr wrap="square" lIns="0" tIns="0" rIns="0" bIns="0" rtlCol="0" anchor="ctr"/>
           <a:lstStyle/>
           <a:p>
-            <a:pPr indent="0" marL="0">
+            <a:pPr marL="0" indent="0">
               <a:buNone/>
             </a:pPr>
             <a:r>
@@ -9457,7 +9442,7 @@
           <a:bodyPr wrap="square" lIns="0" tIns="0" rIns="0" bIns="0" rtlCol="0" anchor="ctr"/>
           <a:lstStyle/>
           <a:p>
-            <a:pPr algn="ctr" indent="0" marL="0">
+            <a:pPr marL="0" indent="0" algn="ctr">
               <a:buNone/>
             </a:pPr>
             <a:r>
@@ -9491,6 +9476,7 @@
         <a:solidFill>
           <a:srgbClr val="0F172A"/>
         </a:solidFill>
+        <a:effectLst/>
       </p:bgPr>
     </p:bg>
     <p:spTree>
@@ -9582,11 +9568,11 @@
           <a:bodyPr wrap="square" lIns="0" tIns="0" rIns="0" bIns="0" rtlCol="0" anchor="ctr"/>
           <a:lstStyle/>
           <a:p>
-            <a:pPr indent="0" marL="0">
-              <a:buNone/>
-            </a:pPr>
-            <a:r>
-              <a:rPr lang="en-US" sz="1200" b="1" spc="400" kern="0" dirty="0">
+            <a:pPr marL="0" indent="0">
+              <a:buNone/>
+            </a:pPr>
+            <a:r>
+              <a:rPr lang="en-US" sz="1200" b="1" kern="0" spc="400" dirty="0">
                 <a:solidFill>
                   <a:srgbClr val="326CE5"/>
                 </a:solidFill>
@@ -9621,7 +9607,7 @@
           <a:bodyPr wrap="square" lIns="0" tIns="0" rIns="0" bIns="0" rtlCol="0" anchor="ctr"/>
           <a:lstStyle/>
           <a:p>
-            <a:pPr indent="0" marL="0">
+            <a:pPr marL="0" indent="0">
               <a:buNone/>
             </a:pPr>
             <a:r>
@@ -9660,7 +9646,7 @@
           <a:bodyPr wrap="square" lIns="0" tIns="0" rIns="0" bIns="0" rtlCol="0" anchor="ctr"/>
           <a:lstStyle/>
           <a:p>
-            <a:pPr indent="0" marL="0">
+            <a:pPr marL="0" indent="0">
               <a:buNone/>
             </a:pPr>
             <a:r>
@@ -9694,6 +9680,7 @@
         <a:solidFill>
           <a:srgbClr val="FFFFFF"/>
         </a:solidFill>
+        <a:effectLst/>
       </p:bgPr>
     </p:bg>
     <p:spTree>
@@ -9756,7 +9743,7 @@
           <a:bodyPr wrap="square" lIns="0" tIns="0" rIns="0" bIns="0" rtlCol="0" anchor="ctr"/>
           <a:lstStyle/>
           <a:p>
-            <a:pPr indent="0" marL="0">
+            <a:pPr marL="0" indent="0">
               <a:buNone/>
             </a:pPr>
             <a:r>
@@ -9822,7 +9809,7 @@
           <a:bodyPr wrap="square" lIns="0" tIns="0" rIns="0" bIns="0" rtlCol="0" anchor="ctr"/>
           <a:lstStyle/>
           <a:p>
-            <a:pPr algn="ctr" indent="0" marL="0">
+            <a:pPr marL="0" indent="0" algn="ctr">
               <a:buNone/>
             </a:pPr>
             <a:r>
@@ -9866,7 +9853,7 @@
             <a:prstDash val="solid"/>
           </a:ln>
           <a:effectLst>
-            <a:outerShdw sx="100000" sy="100000" kx="0" ky="0" algn="bl" rotWithShape="0" blurRad="76200" dist="38100" dir="2700000">
+            <a:outerShdw blurRad="76200" dist="38100" dir="2700000" algn="bl" rotWithShape="0">
               <a:srgbClr val="000000">
                 <a:alpha val="10000"/>
               </a:srgbClr>
@@ -9895,7 +9882,7 @@
           <a:bodyPr wrap="square" lIns="0" tIns="0" rIns="0" bIns="0" rtlCol="0" anchor="ctr"/>
           <a:lstStyle/>
           <a:p>
-            <a:pPr indent="0" marL="0">
+            <a:pPr marL="0" indent="0">
               <a:buNone/>
             </a:pPr>
             <a:r>
@@ -9959,7 +9946,7 @@
           <a:bodyPr wrap="square" lIns="0" tIns="0" rIns="0" bIns="0" rtlCol="0" anchor="ctr"/>
           <a:lstStyle/>
           <a:p>
-            <a:pPr indent="0" marL="0">
+            <a:pPr marL="0" indent="0">
               <a:buNone/>
             </a:pPr>
             <a:r>
@@ -9998,7 +9985,7 @@
           <a:bodyPr wrap="square" lIns="0" tIns="0" rIns="0" bIns="0" rtlCol="0" anchor="ctr"/>
           <a:lstStyle/>
           <a:p>
-            <a:pPr indent="0" marL="0">
+            <a:pPr marL="0" indent="0">
               <a:buNone/>
             </a:pPr>
             <a:r>
@@ -10037,7 +10024,7 @@
           <a:bodyPr wrap="square" lIns="0" tIns="0" rIns="0" bIns="0" rtlCol="0" anchor="ctr"/>
           <a:lstStyle/>
           <a:p>
-            <a:pPr indent="0" marL="0">
+            <a:pPr marL="0" indent="0">
               <a:buNone/>
             </a:pPr>
             <a:r>
@@ -10101,7 +10088,7 @@
           <a:bodyPr wrap="square" lIns="0" tIns="0" rIns="0" bIns="0" rtlCol="0" anchor="ctr"/>
           <a:lstStyle/>
           <a:p>
-            <a:pPr indent="0" marL="0">
+            <a:pPr marL="0" indent="0">
               <a:buNone/>
             </a:pPr>
             <a:r>
@@ -10140,7 +10127,7 @@
           <a:bodyPr wrap="square" lIns="0" tIns="0" rIns="0" bIns="0" rtlCol="0" anchor="ctr"/>
           <a:lstStyle/>
           <a:p>
-            <a:pPr indent="0" marL="0">
+            <a:pPr marL="0" indent="0">
               <a:buNone/>
             </a:pPr>
             <a:r>
@@ -10179,7 +10166,7 @@
           <a:bodyPr wrap="square" lIns="0" tIns="0" rIns="0" bIns="0" rtlCol="0" anchor="ctr"/>
           <a:lstStyle/>
           <a:p>
-            <a:pPr indent="0" marL="0">
+            <a:pPr marL="0" indent="0">
               <a:buNone/>
             </a:pPr>
             <a:r>
@@ -10243,7 +10230,7 @@
           <a:bodyPr wrap="square" lIns="0" tIns="0" rIns="0" bIns="0" rtlCol="0" anchor="ctr"/>
           <a:lstStyle/>
           <a:p>
-            <a:pPr indent="0" marL="0">
+            <a:pPr marL="0" indent="0">
               <a:buNone/>
             </a:pPr>
             <a:r>
@@ -10282,7 +10269,7 @@
           <a:bodyPr wrap="square" lIns="0" tIns="0" rIns="0" bIns="0" rtlCol="0" anchor="ctr"/>
           <a:lstStyle/>
           <a:p>
-            <a:pPr indent="0" marL="0">
+            <a:pPr marL="0" indent="0">
               <a:buNone/>
             </a:pPr>
             <a:r>
@@ -10321,7 +10308,7 @@
           <a:bodyPr wrap="square" lIns="0" tIns="0" rIns="0" bIns="0" rtlCol="0" anchor="ctr"/>
           <a:lstStyle/>
           <a:p>
-            <a:pPr indent="0" marL="0">
+            <a:pPr marL="0" indent="0">
               <a:buNone/>
             </a:pPr>
             <a:r>
@@ -10385,7 +10372,7 @@
           <a:bodyPr wrap="square" lIns="0" tIns="0" rIns="0" bIns="0" rtlCol="0" anchor="ctr"/>
           <a:lstStyle/>
           <a:p>
-            <a:pPr indent="0" marL="0">
+            <a:pPr marL="0" indent="0">
               <a:buNone/>
             </a:pPr>
             <a:r>
@@ -10424,7 +10411,7 @@
           <a:bodyPr wrap="square" lIns="0" tIns="0" rIns="0" bIns="0" rtlCol="0" anchor="ctr"/>
           <a:lstStyle/>
           <a:p>
-            <a:pPr indent="0" marL="0">
+            <a:pPr marL="0" indent="0">
               <a:buNone/>
             </a:pPr>
             <a:r>
@@ -10463,7 +10450,7 @@
           <a:bodyPr wrap="square" lIns="0" tIns="0" rIns="0" bIns="0" rtlCol="0" anchor="ctr"/>
           <a:lstStyle/>
           <a:p>
-            <a:pPr indent="0" marL="0">
+            <a:pPr marL="0" indent="0">
               <a:buNone/>
             </a:pPr>
             <a:r>
@@ -10527,7 +10514,7 @@
           <a:bodyPr wrap="square" lIns="0" tIns="0" rIns="0" bIns="0" rtlCol="0" anchor="ctr"/>
           <a:lstStyle/>
           <a:p>
-            <a:pPr indent="0" marL="0">
+            <a:pPr marL="0" indent="0">
               <a:buNone/>
             </a:pPr>
             <a:r>
@@ -10566,7 +10553,7 @@
           <a:bodyPr wrap="square" lIns="0" tIns="0" rIns="0" bIns="0" rtlCol="0" anchor="ctr"/>
           <a:lstStyle/>
           <a:p>
-            <a:pPr indent="0" marL="0">
+            <a:pPr marL="0" indent="0">
               <a:buNone/>
             </a:pPr>
             <a:r>
@@ -10605,7 +10592,7 @@
           <a:bodyPr wrap="square" lIns="0" tIns="0" rIns="0" bIns="0" rtlCol="0" anchor="ctr"/>
           <a:lstStyle/>
           <a:p>
-            <a:pPr indent="0" marL="0">
+            <a:pPr marL="0" indent="0">
               <a:buNone/>
             </a:pPr>
             <a:r>
@@ -10669,7 +10656,7 @@
           <a:bodyPr wrap="square" lIns="0" tIns="0" rIns="0" bIns="0" rtlCol="0" anchor="ctr"/>
           <a:lstStyle/>
           <a:p>
-            <a:pPr indent="0" marL="0">
+            <a:pPr marL="0" indent="0">
               <a:buNone/>
             </a:pPr>
             <a:r>
@@ -10708,7 +10695,7 @@
           <a:bodyPr wrap="square" lIns="0" tIns="0" rIns="0" bIns="0" rtlCol="0" anchor="ctr"/>
           <a:lstStyle/>
           <a:p>
-            <a:pPr indent="0" marL="0">
+            <a:pPr marL="0" indent="0">
               <a:buNone/>
             </a:pPr>
             <a:r>
@@ -10747,7 +10734,7 @@
           <a:bodyPr wrap="square" lIns="0" tIns="0" rIns="0" bIns="0" rtlCol="0" anchor="ctr"/>
           <a:lstStyle/>
           <a:p>
-            <a:pPr indent="0" marL="0">
+            <a:pPr marL="0" indent="0">
               <a:buNone/>
             </a:pPr>
             <a:r>
@@ -10791,7 +10778,7 @@
             <a:prstDash val="solid"/>
           </a:ln>
           <a:effectLst>
-            <a:outerShdw sx="100000" sy="100000" kx="0" ky="0" algn="bl" rotWithShape="0" blurRad="76200" dist="38100" dir="2700000">
+            <a:outerShdw blurRad="76200" dist="38100" dir="2700000" algn="bl" rotWithShape="0">
               <a:srgbClr val="000000">
                 <a:alpha val="10000"/>
               </a:srgbClr>
@@ -10820,7 +10807,7 @@
           <a:bodyPr wrap="square" lIns="0" tIns="0" rIns="0" bIns="0" rtlCol="0" anchor="ctr"/>
           <a:lstStyle/>
           <a:p>
-            <a:pPr indent="0" marL="0">
+            <a:pPr marL="0" indent="0">
               <a:buNone/>
             </a:pPr>
             <a:r>
@@ -10859,7 +10846,7 @@
           <a:bodyPr wrap="square" lIns="0" tIns="0" rIns="0" bIns="0" rtlCol="0" anchor="ctr"/>
           <a:lstStyle/>
           <a:p>
-            <a:pPr indent="0" marL="0">
+            <a:pPr marL="0" indent="0">
               <a:buNone/>
             </a:pPr>
             <a:r>
@@ -10898,7 +10885,7 @@
           <a:bodyPr wrap="square" lIns="0" tIns="0" rIns="0" bIns="0" rtlCol="0" anchor="ctr"/>
           <a:lstStyle/>
           <a:p>
-            <a:pPr indent="0" marL="0">
+            <a:pPr marL="0" indent="0">
               <a:buNone/>
             </a:pPr>
             <a:r>
@@ -10937,7 +10924,7 @@
           <a:bodyPr wrap="square" lIns="0" tIns="0" rIns="0" bIns="0" rtlCol="0" anchor="ctr"/>
           <a:lstStyle/>
           <a:p>
-            <a:pPr indent="0" marL="0">
+            <a:pPr marL="0" indent="0">
               <a:buNone/>
             </a:pPr>
             <a:r>
@@ -10976,7 +10963,7 @@
           <a:bodyPr wrap="square" lIns="0" tIns="0" rIns="0" bIns="0" rtlCol="0" anchor="ctr"/>
           <a:lstStyle/>
           <a:p>
-            <a:pPr indent="0" marL="0">
+            <a:pPr marL="0" indent="0">
               <a:buNone/>
             </a:pPr>
             <a:r>
@@ -11040,7 +11027,7 @@
           <a:bodyPr wrap="square" lIns="0" tIns="0" rIns="0" bIns="0" rtlCol="0" anchor="ctr"/>
           <a:lstStyle/>
           <a:p>
-            <a:pPr algn="ctr" indent="0" marL="0">
+            <a:pPr marL="0" indent="0" algn="ctr">
               <a:buNone/>
             </a:pPr>
             <a:r>
@@ -11359,4 +11346,299 @@
     </a:ext>
   </a:extLst>
 </a:theme>
+</file>
+
+<file path=ppt/theme/theme2.xml><?xml version="1.0" encoding="utf-8"?>
+<a:theme xmlns:a="http://schemas.openxmlformats.org/drawingml/2006/main" name="Office Theme">
+  <a:themeElements>
+    <a:clrScheme name="Office">
+      <a:dk1>
+        <a:sysClr val="windowText" lastClr="000000"/>
+      </a:dk1>
+      <a:lt1>
+        <a:sysClr val="window" lastClr="FFFFFF"/>
+      </a:lt1>
+      <a:dk2>
+        <a:srgbClr val="44546A"/>
+      </a:dk2>
+      <a:lt2>
+        <a:srgbClr val="E7E6E6"/>
+      </a:lt2>
+      <a:accent1>
+        <a:srgbClr val="4472C4"/>
+      </a:accent1>
+      <a:accent2>
+        <a:srgbClr val="ED7D31"/>
+      </a:accent2>
+      <a:accent3>
+        <a:srgbClr val="A5A5A5"/>
+      </a:accent3>
+      <a:accent4>
+        <a:srgbClr val="FFC000"/>
+      </a:accent4>
+      <a:accent5>
+        <a:srgbClr val="5B9BD5"/>
+      </a:accent5>
+      <a:accent6>
+        <a:srgbClr val="70AD47"/>
+      </a:accent6>
+      <a:hlink>
+        <a:srgbClr val="0563C1"/>
+      </a:hlink>
+      <a:folHlink>
+        <a:srgbClr val="954F72"/>
+      </a:folHlink>
+    </a:clrScheme>
+    <a:fontScheme name="Office">
+      <a:majorFont>
+        <a:latin typeface="Calibri Light" panose="020F0302020204030204"/>
+        <a:ea typeface=""/>
+        <a:cs typeface=""/>
+        <a:font script="Jpan" typeface="游ゴシック Light"/>
+        <a:font script="Hang" typeface="맑은 고딕"/>
+        <a:font script="Hans" typeface="等线 Light"/>
+        <a:font script="Hant" typeface="新細明體"/>
+        <a:font script="Arab" typeface="Times New Roman"/>
+        <a:font script="Hebr" typeface="Times New Roman"/>
+        <a:font script="Thai" typeface="Angsana New"/>
+        <a:font script="Ethi" typeface="Nyala"/>
+        <a:font script="Beng" typeface="Vrinda"/>
+        <a:font script="Gujr" typeface="Shruti"/>
+        <a:font script="Khmr" typeface="MoolBoran"/>
+        <a:font script="Knda" typeface="Tunga"/>
+        <a:font script="Guru" typeface="Raavi"/>
+        <a:font script="Cans" typeface="Euphemia"/>
+        <a:font script="Cher" typeface="Plantagenet Cherokee"/>
+        <a:font script="Yiii" typeface="Microsoft Yi Baiti"/>
+        <a:font script="Tibt" typeface="Microsoft Himalaya"/>
+        <a:font script="Thaa" typeface="MV Boli"/>
+        <a:font script="Deva" typeface="Mangal"/>
+        <a:font script="Telu" typeface="Gautami"/>
+        <a:font script="Taml" typeface="Latha"/>
+        <a:font script="Syrc" typeface="Estrangelo Edessa"/>
+        <a:font script="Orya" typeface="Kalinga"/>
+        <a:font script="Mlym" typeface="Kartika"/>
+        <a:font script="Laoo" typeface="DokChampa"/>
+        <a:font script="Sinh" typeface="Iskoola Pota"/>
+        <a:font script="Mong" typeface="Mongolian Baiti"/>
+        <a:font script="Viet" typeface="Times New Roman"/>
+        <a:font script="Uigh" typeface="Microsoft Uighur"/>
+        <a:font script="Geor" typeface="Sylfaen"/>
+        <a:font script="Armn" typeface="Arial"/>
+        <a:font script="Bugi" typeface="Leelawadee UI"/>
+        <a:font script="Bopo" typeface="Microsoft JhengHei"/>
+        <a:font script="Java" typeface="Javanese Text"/>
+        <a:font script="Lisu" typeface="Segoe UI"/>
+        <a:font script="Mymr" typeface="Myanmar Text"/>
+        <a:font script="Nkoo" typeface="Ebrima"/>
+        <a:font script="Olck" typeface="Nirmala UI"/>
+        <a:font script="Osma" typeface="Ebrima"/>
+        <a:font script="Phag" typeface="Phagspa"/>
+        <a:font script="Syrn" typeface="Estrangelo Edessa"/>
+        <a:font script="Syrj" typeface="Estrangelo Edessa"/>
+        <a:font script="Syre" typeface="Estrangelo Edessa"/>
+        <a:font script="Sora" typeface="Nirmala UI"/>
+        <a:font script="Tale" typeface="Microsoft Tai Le"/>
+        <a:font script="Talu" typeface="Microsoft New Tai Lue"/>
+        <a:font script="Tfng" typeface="Ebrima"/>
+      </a:majorFont>
+      <a:minorFont>
+        <a:latin typeface="Calibri" panose="020F0502020204030204"/>
+        <a:ea typeface=""/>
+        <a:cs typeface=""/>
+        <a:font script="Jpan" typeface="游ゴシック"/>
+        <a:font script="Hang" typeface="맑은 고딕"/>
+        <a:font script="Hans" typeface="等线"/>
+        <a:font script="Hant" typeface="新細明體"/>
+        <a:font script="Arab" typeface="Arial"/>
+        <a:font script="Hebr" typeface="Arial"/>
+        <a:font script="Thai" typeface="Cordia New"/>
+        <a:font script="Ethi" typeface="Nyala"/>
+        <a:font script="Beng" typeface="Vrinda"/>
+        <a:font script="Gujr" typeface="Shruti"/>
+        <a:font script="Khmr" typeface="DaunPenh"/>
+        <a:font script="Knda" typeface="Tunga"/>
+        <a:font script="Guru" typeface="Raavi"/>
+        <a:font script="Cans" typeface="Euphemia"/>
+        <a:font script="Cher" typeface="Plantagenet Cherokee"/>
+        <a:font script="Yiii" typeface="Microsoft Yi Baiti"/>
+        <a:font script="Tibt" typeface="Microsoft Himalaya"/>
+        <a:font script="Thaa" typeface="MV Boli"/>
+        <a:font script="Deva" typeface="Mangal"/>
+        <a:font script="Telu" typeface="Gautami"/>
+        <a:font script="Taml" typeface="Latha"/>
+        <a:font script="Syrc" typeface="Estrangelo Edessa"/>
+        <a:font script="Orya" typeface="Kalinga"/>
+        <a:font script="Mlym" typeface="Kartika"/>
+        <a:font script="Laoo" typeface="DokChampa"/>
+        <a:font script="Sinh" typeface="Iskoola Pota"/>
+        <a:font script="Mong" typeface="Mongolian Baiti"/>
+        <a:font script="Viet" typeface="Arial"/>
+        <a:font script="Uigh" typeface="Microsoft Uighur"/>
+        <a:font script="Geor" typeface="Sylfaen"/>
+        <a:font script="Armn" typeface="Arial"/>
+        <a:font script="Bugi" typeface="Leelawadee UI"/>
+        <a:font script="Bopo" typeface="Microsoft JhengHei"/>
+        <a:font script="Java" typeface="Javanese Text"/>
+        <a:font script="Lisu" typeface="Segoe UI"/>
+        <a:font script="Mymr" typeface="Myanmar Text"/>
+        <a:font script="Nkoo" typeface="Ebrima"/>
+        <a:font script="Olck" typeface="Nirmala UI"/>
+        <a:font script="Osma" typeface="Ebrima"/>
+        <a:font script="Phag" typeface="Phagspa"/>
+        <a:font script="Syrn" typeface="Estrangelo Edessa"/>
+        <a:font script="Syrj" typeface="Estrangelo Edessa"/>
+        <a:font script="Syre" typeface="Estrangelo Edessa"/>
+        <a:font script="Sora" typeface="Nirmala UI"/>
+        <a:font script="Tale" typeface="Microsoft Tai Le"/>
+        <a:font script="Talu" typeface="Microsoft New Tai Lue"/>
+        <a:font script="Tfng" typeface="Ebrima"/>
+      </a:minorFont>
+    </a:fontScheme>
+    <a:fmtScheme name="Office">
+      <a:fillStyleLst>
+        <a:solidFill>
+          <a:schemeClr val="phClr"/>
+        </a:solidFill>
+        <a:gradFill rotWithShape="1">
+          <a:gsLst>
+            <a:gs pos="0">
+              <a:schemeClr val="phClr">
+                <a:lumMod val="110000"/>
+                <a:satMod val="105000"/>
+                <a:tint val="67000"/>
+              </a:schemeClr>
+            </a:gs>
+            <a:gs pos="50000">
+              <a:schemeClr val="phClr">
+                <a:lumMod val="105000"/>
+                <a:satMod val="103000"/>
+                <a:tint val="73000"/>
+              </a:schemeClr>
+            </a:gs>
+            <a:gs pos="100000">
+              <a:schemeClr val="phClr">
+                <a:lumMod val="105000"/>
+                <a:satMod val="109000"/>
+                <a:tint val="81000"/>
+              </a:schemeClr>
+            </a:gs>
+          </a:gsLst>
+          <a:lin ang="5400000" scaled="0"/>
+        </a:gradFill>
+        <a:gradFill rotWithShape="1">
+          <a:gsLst>
+            <a:gs pos="0">
+              <a:schemeClr val="phClr">
+                <a:satMod val="103000"/>
+                <a:lumMod val="102000"/>
+                <a:tint val="94000"/>
+              </a:schemeClr>
+            </a:gs>
+            <a:gs pos="50000">
+              <a:schemeClr val="phClr">
+                <a:satMod val="110000"/>
+                <a:lumMod val="100000"/>
+                <a:shade val="100000"/>
+              </a:schemeClr>
+            </a:gs>
+            <a:gs pos="100000">
+              <a:schemeClr val="phClr">
+                <a:lumMod val="99000"/>
+                <a:satMod val="120000"/>
+                <a:shade val="78000"/>
+              </a:schemeClr>
+            </a:gs>
+          </a:gsLst>
+          <a:lin ang="5400000" scaled="0"/>
+        </a:gradFill>
+      </a:fillStyleLst>
+      <a:lnStyleLst>
+        <a:ln w="6350" cap="flat" cmpd="sng" algn="ctr">
+          <a:solidFill>
+            <a:schemeClr val="phClr"/>
+          </a:solidFill>
+          <a:prstDash val="solid"/>
+          <a:miter lim="800000"/>
+        </a:ln>
+        <a:ln w="12700" cap="flat" cmpd="sng" algn="ctr">
+          <a:solidFill>
+            <a:schemeClr val="phClr"/>
+          </a:solidFill>
+          <a:prstDash val="solid"/>
+          <a:miter lim="800000"/>
+        </a:ln>
+        <a:ln w="19050" cap="flat" cmpd="sng" algn="ctr">
+          <a:solidFill>
+            <a:schemeClr val="phClr"/>
+          </a:solidFill>
+          <a:prstDash val="solid"/>
+          <a:miter lim="800000"/>
+        </a:ln>
+      </a:lnStyleLst>
+      <a:effectStyleLst>
+        <a:effectStyle>
+          <a:effectLst/>
+        </a:effectStyle>
+        <a:effectStyle>
+          <a:effectLst/>
+        </a:effectStyle>
+        <a:effectStyle>
+          <a:effectLst>
+            <a:outerShdw blurRad="57150" dist="19050" dir="5400000" algn="ctr" rotWithShape="0">
+              <a:srgbClr val="000000">
+                <a:alpha val="63000"/>
+              </a:srgbClr>
+            </a:outerShdw>
+          </a:effectLst>
+        </a:effectStyle>
+      </a:effectStyleLst>
+      <a:bgFillStyleLst>
+        <a:solidFill>
+          <a:schemeClr val="phClr"/>
+        </a:solidFill>
+        <a:solidFill>
+          <a:schemeClr val="phClr">
+            <a:tint val="95000"/>
+            <a:satMod val="170000"/>
+          </a:schemeClr>
+        </a:solidFill>
+        <a:gradFill rotWithShape="1">
+          <a:gsLst>
+            <a:gs pos="0">
+              <a:schemeClr val="phClr">
+                <a:tint val="93000"/>
+                <a:satMod val="150000"/>
+                <a:shade val="98000"/>
+                <a:lumMod val="102000"/>
+              </a:schemeClr>
+            </a:gs>
+            <a:gs pos="50000">
+              <a:schemeClr val="phClr">
+                <a:tint val="98000"/>
+                <a:satMod val="130000"/>
+                <a:shade val="90000"/>
+                <a:lumMod val="103000"/>
+              </a:schemeClr>
+            </a:gs>
+            <a:gs pos="100000">
+              <a:schemeClr val="phClr">
+                <a:shade val="63000"/>
+                <a:satMod val="120000"/>
+              </a:schemeClr>
+            </a:gs>
+          </a:gsLst>
+          <a:lin ang="5400000" scaled="0"/>
+        </a:gradFill>
+      </a:bgFillStyleLst>
+    </a:fmtScheme>
+  </a:themeElements>
+  <a:objectDefaults/>
+  <a:extraClrSchemeLst/>
+  <a:extLst>
+    <a:ext uri="{05A4C25C-085E-4340-85A3-A5531E510DB2}">
+      <thm15:themeFamily xmlns:thm15="http://schemas.microsoft.com/office/thememl/2012/main" name="Office Theme" id="{62F939B6-93AF-4DB8-9C6B-D6C7DFDC589F}" vid="{4A3C46E8-61CC-4603-A589-7422A47A8E4A}"/>
+    </a:ext>
+  </a:extLst>
+</a:theme>
 </file>